--- a/26/ase26/DRR_slides_v5.pptx
+++ b/26/ase26/DRR_slides_v5.pptx
@@ -5,23 +5,24 @@
     <p:sldMasterId id="2147483648" r:id="rId1"/>
   </p:sldMasterIdLst>
   <p:notesMasterIdLst>
-    <p:notesMasterId r:id="rId16"/>
+    <p:notesMasterId r:id="rId17"/>
   </p:notesMasterIdLst>
   <p:sldIdLst>
     <p:sldId id="256" r:id="rId2"/>
     <p:sldId id="257" r:id="rId3"/>
     <p:sldId id="258" r:id="rId4"/>
-    <p:sldId id="259" r:id="rId5"/>
-    <p:sldId id="260" r:id="rId6"/>
-    <p:sldId id="261" r:id="rId7"/>
-    <p:sldId id="262" r:id="rId8"/>
-    <p:sldId id="263" r:id="rId9"/>
-    <p:sldId id="264" r:id="rId10"/>
-    <p:sldId id="265" r:id="rId11"/>
-    <p:sldId id="266" r:id="rId12"/>
-    <p:sldId id="267" r:id="rId13"/>
-    <p:sldId id="268" r:id="rId14"/>
-    <p:sldId id="269" r:id="rId15"/>
+    <p:sldId id="270" r:id="rId5"/>
+    <p:sldId id="259" r:id="rId6"/>
+    <p:sldId id="260" r:id="rId7"/>
+    <p:sldId id="276" r:id="rId8"/>
+    <p:sldId id="262" r:id="rId9"/>
+    <p:sldId id="261" r:id="rId10"/>
+    <p:sldId id="263" r:id="rId11"/>
+    <p:sldId id="265" r:id="rId12"/>
+    <p:sldId id="266" r:id="rId13"/>
+    <p:sldId id="267" r:id="rId14"/>
+    <p:sldId id="268" r:id="rId15"/>
+    <p:sldId id="269" r:id="rId16"/>
   </p:sldIdLst>
   <p:sldSz cx="9144000" cy="5143500" type="screen16x9"/>
   <p:notesSz cx="5143500" cy="9144000"/>
@@ -702,7 +703,7 @@
           <a:p>
             <a:fld id="{F7021451-1387-4CA6-816F-3879F97B5CBC}" type="slidenum">
               <a:rPr lang="en-US"/>
-              <a:t>10</a:t>
+              <a:t>11</a:t>
             </a:fld>
             <a:endParaRPr lang="en-US"/>
           </a:p>
@@ -786,7 +787,7 @@
           <a:p>
             <a:fld id="{F7021451-1387-4CA6-816F-3879F97B5CBC}" type="slidenum">
               <a:rPr lang="en-US"/>
-              <a:t>11</a:t>
+              <a:t>12</a:t>
             </a:fld>
             <a:endParaRPr lang="en-US"/>
           </a:p>
@@ -870,7 +871,7 @@
           <a:p>
             <a:fld id="{F7021451-1387-4CA6-816F-3879F97B5CBC}" type="slidenum">
               <a:rPr lang="en-US"/>
-              <a:t>12</a:t>
+              <a:t>13</a:t>
             </a:fld>
             <a:endParaRPr lang="en-US"/>
           </a:p>
@@ -954,7 +955,7 @@
           <a:p>
             <a:fld id="{F7021451-1387-4CA6-816F-3879F97B5CBC}" type="slidenum">
               <a:rPr lang="en-US"/>
-              <a:t>13</a:t>
+              <a:t>14</a:t>
             </a:fld>
             <a:endParaRPr lang="en-US"/>
           </a:p>
@@ -1038,7 +1039,7 @@
           <a:p>
             <a:fld id="{F7021451-1387-4CA6-816F-3879F97B5CBC}" type="slidenum">
               <a:rPr lang="en-US"/>
-              <a:t>14</a:t>
+              <a:t>15</a:t>
             </a:fld>
             <a:endParaRPr lang="en-US"/>
           </a:p>
@@ -1300,7 +1301,7 @@
           <a:p>
             <a:fld id="{F7021451-1387-4CA6-816F-3879F97B5CBC}" type="slidenum">
               <a:rPr lang="en-US"/>
-              <a:t>4</a:t>
+              <a:t>5</a:t>
             </a:fld>
             <a:endParaRPr lang="en-US"/>
           </a:p>
@@ -1384,7 +1385,7 @@
           <a:p>
             <a:fld id="{F7021451-1387-4CA6-816F-3879F97B5CBC}" type="slidenum">
               <a:rPr lang="en-US"/>
-              <a:t>5</a:t>
+              <a:t>6</a:t>
             </a:fld>
             <a:endParaRPr lang="en-US"/>
           </a:p>
@@ -1408,7 +1409,13 @@
   <p:cSld>
     <p:spTree>
       <p:nvGrpSpPr>
-        <p:cNvPr id="1" name=""/>
+        <p:cNvPr id="1" name="">
+          <a:extLst>
+            <a:ext uri="{FF2B5EF4-FFF2-40B4-BE49-F238E27FC236}">
+              <a16:creationId xmlns:a16="http://schemas.microsoft.com/office/drawing/2014/main" id="{D2B4D6CB-1738-C284-4AAA-0B18F033AF49}"/>
+            </a:ext>
+          </a:extLst>
+        </p:cNvPr>
         <p:cNvGrpSpPr/>
         <p:nvPr/>
       </p:nvGrpSpPr>
@@ -1422,7 +1429,13 @@
       </p:grpSpPr>
       <p:sp>
         <p:nvSpPr>
-          <p:cNvPr id="2" name="Slide Image Placeholder 1"/>
+          <p:cNvPr id="2" name="Slide Image Placeholder 1">
+            <a:extLst>
+              <a:ext uri="{FF2B5EF4-FFF2-40B4-BE49-F238E27FC236}">
+                <a16:creationId xmlns:a16="http://schemas.microsoft.com/office/drawing/2014/main" id="{ABA7A015-6BFB-644B-9072-E6A82EFDD7E4}"/>
+              </a:ext>
+            </a:extLst>
+          </p:cNvPr>
           <p:cNvSpPr>
             <a:spLocks noGrp="1" noRot="1" noChangeAspect="1"/>
           </p:cNvSpPr>
@@ -1434,7 +1447,13 @@
       </p:sp>
       <p:sp>
         <p:nvSpPr>
-          <p:cNvPr id="3" name="Notes Placeholder 2"/>
+          <p:cNvPr id="3" name="Notes Placeholder 2">
+            <a:extLst>
+              <a:ext uri="{FF2B5EF4-FFF2-40B4-BE49-F238E27FC236}">
+                <a16:creationId xmlns:a16="http://schemas.microsoft.com/office/drawing/2014/main" id="{2F9B78BE-DD2F-A06F-57B2-4E6F9C834DF9}"/>
+              </a:ext>
+            </a:extLst>
+          </p:cNvPr>
           <p:cNvSpPr>
             <a:spLocks noGrp="1"/>
           </p:cNvSpPr>
@@ -1453,7 +1472,13 @@
       </p:sp>
       <p:sp>
         <p:nvSpPr>
-          <p:cNvPr id="4" name="Slide Number Placeholder 3"/>
+          <p:cNvPr id="4" name="Slide Number Placeholder 3">
+            <a:extLst>
+              <a:ext uri="{FF2B5EF4-FFF2-40B4-BE49-F238E27FC236}">
+                <a16:creationId xmlns:a16="http://schemas.microsoft.com/office/drawing/2014/main" id="{0CC9053F-9E17-2F55-4B1E-1641DCD5FA48}"/>
+              </a:ext>
+            </a:extLst>
+          </p:cNvPr>
           <p:cNvSpPr>
             <a:spLocks noGrp="1"/>
           </p:cNvSpPr>
@@ -1468,7 +1493,7 @@
           <a:p>
             <a:fld id="{F7021451-1387-4CA6-816F-3879F97B5CBC}" type="slidenum">
               <a:rPr lang="en-US"/>
-              <a:t>6</a:t>
+              <a:t>7</a:t>
             </a:fld>
             <a:endParaRPr lang="en-US"/>
           </a:p>
@@ -1477,7 +1502,7 @@
     </p:spTree>
     <p:extLst>
       <p:ext uri="{BB962C8B-B14F-4D97-AF65-F5344CB8AC3E}">
-        <p14:creationId xmlns:p14="http://schemas.microsoft.com/office/powerpoint/2010/main" val="1024086991"/>
+        <p14:creationId xmlns:p14="http://schemas.microsoft.com/office/powerpoint/2010/main" val="1070889503"/>
       </p:ext>
     </p:extLst>
   </p:cSld>
@@ -1552,7 +1577,7 @@
           <a:p>
             <a:fld id="{F7021451-1387-4CA6-816F-3879F97B5CBC}" type="slidenum">
               <a:rPr lang="en-US"/>
-              <a:t>7</a:t>
+              <a:t>8</a:t>
             </a:fld>
             <a:endParaRPr lang="en-US"/>
           </a:p>
@@ -1636,7 +1661,7 @@
           <a:p>
             <a:fld id="{F7021451-1387-4CA6-816F-3879F97B5CBC}" type="slidenum">
               <a:rPr lang="en-US"/>
-              <a:t>8</a:t>
+              <a:t>9</a:t>
             </a:fld>
             <a:endParaRPr lang="en-US"/>
           </a:p>
@@ -1720,7 +1745,7 @@
           <a:p>
             <a:fld id="{F7021451-1387-4CA6-816F-3879F97B5CBC}" type="slidenum">
               <a:rPr lang="en-US"/>
-              <a:t>9</a:t>
+              <a:t>10</a:t>
             </a:fld>
             <a:endParaRPr lang="en-US"/>
           </a:p>
@@ -1858,7 +1883,7 @@
           </a:prstGeom>
           <a:extLst>
             <a:ext uri="{C572A759-6A51-4108-AA02-DFA0A04FC94B}">
-              <ma14:wrappingTextBoxFlag xmlns:ma14="http://schemas.microsoft.com/office/mac/drawingml/2011/main" xmlns="" val="0"/>
+              <ma14:wrappingTextBoxFlag xmlns="" xmlns:ma14="http://schemas.microsoft.com/office/mac/drawingml/2011/main" val="0"/>
             </a:ext>
           </a:extLst>
         </p:spPr>
@@ -1969,7 +1994,7 @@
           </a:prstGeom>
           <a:extLst>
             <a:ext uri="{C572A759-6A51-4108-AA02-DFA0A04FC94B}">
-              <ma14:wrappingTextBoxFlag xmlns:ma14="http://schemas.microsoft.com/office/mac/drawingml/2011/main" xmlns="" val="0"/>
+              <ma14:wrappingTextBoxFlag xmlns="" xmlns:ma14="http://schemas.microsoft.com/office/mac/drawingml/2011/main" val="0"/>
             </a:ext>
           </a:extLst>
         </p:spPr>
@@ -2493,6 +2518,341 @@
 
 <file path=ppt/slides/slide10.xml><?xml version="1.0" encoding="utf-8"?>
 <p:sld xmlns:a="http://schemas.openxmlformats.org/drawingml/2006/main" xmlns:r="http://schemas.openxmlformats.org/officeDocument/2006/relationships" xmlns:p="http://schemas.openxmlformats.org/presentationml/2006/main">
+  <p:cSld name="Slide 8">
+    <p:spTree>
+      <p:nvGrpSpPr>
+        <p:cNvPr id="1" name=""/>
+        <p:cNvGrpSpPr/>
+        <p:nvPr/>
+      </p:nvGrpSpPr>
+      <p:grpSpPr>
+        <a:xfrm>
+          <a:off x="0" y="0"/>
+          <a:ext cx="0" cy="0"/>
+          <a:chOff x="0" y="0"/>
+          <a:chExt cx="0" cy="0"/>
+        </a:xfrm>
+      </p:grpSpPr>
+      <p:sp>
+        <p:nvSpPr>
+          <p:cNvPr id="2" name="Text 0"/>
+          <p:cNvSpPr txBox="1"/>
+          <p:nvPr/>
+        </p:nvSpPr>
+        <p:spPr>
+          <a:xfrm>
+            <a:off x="457200" y="274320"/>
+            <a:ext cx="2743200" cy="1188720"/>
+          </a:xfrm>
+          <a:prstGeom prst="rect">
+            <a:avLst/>
+          </a:prstGeom>
+          <a:noFill/>
+          <a:ln/>
+        </p:spPr>
+        <p:txBody>
+          <a:bodyPr wrap="square" lIns="0" tIns="0" rIns="0" bIns="0" rtlCol="0" anchor="t"/>
+          <a:lstStyle/>
+          <a:p>
+            <a:pPr marL="0" indent="0">
+              <a:buNone/>
+            </a:pPr>
+            <a:r>
+              <a:rPr lang="en-US" sz="2800" b="1" dirty="0">
+                <a:solidFill>
+                  <a:srgbClr val="1F2933"/>
+                </a:solidFill>
+                <a:latin typeface="Cambria" pitchFamily="34" charset="0"/>
+                <a:ea typeface="Cambria" pitchFamily="34" charset="-122"/>
+                <a:cs typeface="Cambria" pitchFamily="34" charset="-120"/>
+              </a:rPr>
+              <a:t>DRR predicts when simple is enough</a:t>
+            </a:r>
+            <a:endParaRPr lang="en-US" sz="2800" dirty="0"/>
+          </a:p>
+        </p:txBody>
+      </p:sp>
+      <p:sp>
+        <p:nvSpPr>
+          <p:cNvPr id="3" name="Text 1"/>
+          <p:cNvSpPr txBox="1"/>
+          <p:nvPr/>
+        </p:nvSpPr>
+        <p:spPr>
+          <a:xfrm>
+            <a:off x="457200" y="1783080"/>
+            <a:ext cx="2743200" cy="2743200"/>
+          </a:xfrm>
+          <a:prstGeom prst="rect">
+            <a:avLst/>
+          </a:prstGeom>
+          <a:noFill/>
+          <a:ln/>
+        </p:spPr>
+        <p:txBody>
+          <a:bodyPr wrap="square" lIns="0" tIns="0" rIns="0" bIns="0" rtlCol="0" anchor="t"/>
+          <a:lstStyle/>
+          <a:p>
+            <a:pPr marL="0" indent="0">
+              <a:spcAft>
+                <a:spcPts val="800"/>
+              </a:spcAft>
+              <a:buNone/>
+            </a:pPr>
+            <a:r>
+              <a:rPr lang="en-US" sz="1500" dirty="0">
+                <a:solidFill>
+                  <a:srgbClr val="1F2933"/>
+                </a:solidFill>
+              </a:rPr>
+              <a:t>Each dot is one data set.</a:t>
+            </a:r>
+            <a:endParaRPr lang="en-US" sz="1500" dirty="0"/>
+          </a:p>
+          <a:p>
+            <a:pPr marL="0" indent="0">
+              <a:spcAft>
+                <a:spcPts val="800"/>
+              </a:spcAft>
+              <a:buNone/>
+            </a:pPr>
+            <a:r>
+              <a:rPr lang="en-US" sz="1500" b="1" dirty="0">
+                <a:solidFill>
+                  <a:srgbClr val="A44A3F"/>
+                </a:solidFill>
+              </a:rPr>
+              <a:t>Red</a:t>
+            </a:r>
+            <a:r>
+              <a:rPr lang="en-US" sz="1500" dirty="0">
+                <a:solidFill>
+                  <a:srgbClr val="1F2933"/>
+                </a:solidFill>
+              </a:rPr>
+              <a:t>: DEHB beat LITE.</a:t>
+            </a:r>
+            <a:endParaRPr lang="en-US" sz="1500" dirty="0"/>
+          </a:p>
+          <a:p>
+            <a:pPr marL="0" indent="0">
+              <a:spcAft>
+                <a:spcPts val="800"/>
+              </a:spcAft>
+              <a:buNone/>
+            </a:pPr>
+            <a:r>
+              <a:rPr lang="en-US" sz="1500" b="1" dirty="0">
+                <a:solidFill>
+                  <a:srgbClr val="4E8F4E"/>
+                </a:solidFill>
+              </a:rPr>
+              <a:t>Green</a:t>
+            </a:r>
+            <a:r>
+              <a:rPr lang="en-US" sz="1500" dirty="0">
+                <a:solidFill>
+                  <a:srgbClr val="1F2933"/>
+                </a:solidFill>
+              </a:rPr>
+              <a:t>: a tie.</a:t>
+            </a:r>
+            <a:endParaRPr lang="en-US" sz="1500" dirty="0"/>
+          </a:p>
+          <a:p>
+            <a:pPr marL="0" indent="0">
+              <a:spcAft>
+                <a:spcPts val="800"/>
+              </a:spcAft>
+              <a:buNone/>
+            </a:pPr>
+            <a:r>
+              <a:rPr lang="en-US" sz="1500" b="1" dirty="0">
+                <a:solidFill>
+                  <a:srgbClr val="1F2933"/>
+                </a:solidFill>
+              </a:rPr>
+              <a:t>Top: </a:t>
+            </a:r>
+            <a:r>
+              <a:rPr lang="en-US" sz="1500" dirty="0">
+                <a:solidFill>
+                  <a:srgbClr val="1F2933"/>
+                </a:solidFill>
+              </a:rPr>
+              <a:t>intrinsic dimensionality alone does not split them.</a:t>
+            </a:r>
+            <a:endParaRPr lang="en-US" sz="1500" dirty="0"/>
+          </a:p>
+          <a:p>
+            <a:pPr marL="0" indent="0">
+              <a:spcAft>
+                <a:spcPts val="800"/>
+              </a:spcAft>
+              <a:buNone/>
+            </a:pPr>
+            <a:r>
+              <a:rPr lang="en-US" sz="1500" b="1" dirty="0">
+                <a:solidFill>
+                  <a:srgbClr val="1F2933"/>
+                </a:solidFill>
+              </a:rPr>
+              <a:t>Bottom: </a:t>
+            </a:r>
+            <a:r>
+              <a:rPr lang="en-US" sz="1500" dirty="0">
+                <a:solidFill>
+                  <a:srgbClr val="1F2933"/>
+                </a:solidFill>
+              </a:rPr>
+              <a:t>DRR does. Above 0.35, every data set is a tie.</a:t>
+            </a:r>
+            <a:endParaRPr lang="en-US" sz="1500" dirty="0"/>
+          </a:p>
+        </p:txBody>
+      </p:sp>
+      <p:pic>
+        <p:nvPicPr>
+          <p:cNvPr id="4" name="Image 0" descr="fig3.png"/>
+          <p:cNvPicPr>
+            <a:picLocks noChangeAspect="1"/>
+          </p:cNvPicPr>
+          <p:nvPr/>
+        </p:nvPicPr>
+        <p:blipFill>
+          <a:blip r:embed="rId3"/>
+          <a:stretch>
+            <a:fillRect/>
+          </a:stretch>
+        </p:blipFill>
+        <p:spPr>
+          <a:xfrm>
+            <a:off x="3383280" y="274320"/>
+            <a:ext cx="5303520" cy="1943880"/>
+          </a:xfrm>
+          <a:prstGeom prst="rect">
+            <a:avLst/>
+          </a:prstGeom>
+        </p:spPr>
+      </p:pic>
+      <p:pic>
+        <p:nvPicPr>
+          <p:cNvPr id="5" name="Image 1" descr="fig4.png"/>
+          <p:cNvPicPr>
+            <a:picLocks noChangeAspect="1"/>
+          </p:cNvPicPr>
+          <p:nvPr/>
+        </p:nvPicPr>
+        <p:blipFill>
+          <a:blip r:embed="rId4"/>
+          <a:stretch>
+            <a:fillRect/>
+          </a:stretch>
+        </p:blipFill>
+        <p:spPr>
+          <a:xfrm>
+            <a:off x="3383280" y="2331720"/>
+            <a:ext cx="5303520" cy="1934664"/>
+          </a:xfrm>
+          <a:prstGeom prst="rect">
+            <a:avLst/>
+          </a:prstGeom>
+        </p:spPr>
+      </p:pic>
+      <p:sp>
+        <p:nvSpPr>
+          <p:cNvPr id="6" name="Text 2"/>
+          <p:cNvSpPr txBox="1"/>
+          <p:nvPr/>
+        </p:nvSpPr>
+        <p:spPr>
+          <a:xfrm>
+            <a:off x="457200" y="4709160"/>
+            <a:ext cx="7680960" cy="274320"/>
+          </a:xfrm>
+          <a:prstGeom prst="rect">
+            <a:avLst/>
+          </a:prstGeom>
+          <a:noFill/>
+          <a:ln/>
+        </p:spPr>
+        <p:txBody>
+          <a:bodyPr wrap="square" lIns="0" tIns="0" rIns="0" bIns="0" rtlCol="0" anchor="b"/>
+          <a:lstStyle/>
+          <a:p>
+            <a:pPr marL="0" indent="0">
+              <a:buNone/>
+            </a:pPr>
+            <a:r>
+              <a:rPr lang="en-US" sz="1000" dirty="0">
+                <a:solidFill>
+                  <a:srgbClr val="5C6B73"/>
+                </a:solidFill>
+              </a:rPr>
+              <a:t>Lustosa &amp; Menzies, IEEE TSE, 2026, Figs. 3 and 4.</a:t>
+            </a:r>
+            <a:endParaRPr lang="en-US" sz="1000" dirty="0"/>
+          </a:p>
+        </p:txBody>
+      </p:sp>
+      <p:sp>
+        <p:nvSpPr>
+          <p:cNvPr id="25" name="Slide Number Placeholder 0"/>
+          <p:cNvSpPr>
+            <a:spLocks noGrp="1"/>
+          </p:cNvSpPr>
+          <p:nvPr>
+            <p:ph type="sldNum" sz="quarter" idx="4294967295"/>
+          </p:nvPr>
+        </p:nvSpPr>
+        <p:spPr>
+          <a:xfrm>
+            <a:off x="8229600" y="4754880"/>
+            <a:ext cx="502920" cy="274320"/>
+          </a:xfrm>
+          <a:prstGeom prst="rect">
+            <a:avLst/>
+          </a:prstGeom>
+          <a:extLst>
+            <a:ext uri="{C572A759-6A51-4108-AA02-DFA0A04FC94B}">
+              <ma14:wrappingTextBoxFlag xmlns="" xmlns:ma14="http://schemas.microsoft.com/office/mac/drawingml/2011/main" val="0"/>
+            </a:ext>
+          </a:extLst>
+        </p:spPr>
+        <p:txBody>
+          <a:bodyPr/>
+          <a:lstStyle>
+            <a:lvl1pPr>
+              <a:defRPr sz="1000">
+                <a:solidFill>
+                  <a:srgbClr val="5C6B73"/>
+                </a:solidFill>
+                <a:latin typeface="Calibri"/>
+                <a:ea typeface="Calibri"/>
+                <a:cs typeface="Calibri"/>
+              </a:defRPr>
+            </a:lvl1pPr>
+          </a:lstStyle>
+          <a:p>
+            <a:pPr algn="r"/>
+            <a:fld id="{F7021451-1387-4CA6-816F-3879F97B5CBC}" type="slidenum">
+              <a:rPr lang="en-US" b="0"/>
+              <a:t>10</a:t>
+            </a:fld>
+            <a:endParaRPr lang="en-US"/>
+          </a:p>
+        </p:txBody>
+      </p:sp>
+    </p:spTree>
+  </p:cSld>
+  <p:clrMapOvr>
+    <a:masterClrMapping/>
+  </p:clrMapOvr>
+</p:sld>
+</file>
+
+<file path=ppt/slides/slide11.xml><?xml version="1.0" encoding="utf-8"?>
+<p:sld xmlns:a="http://schemas.openxmlformats.org/drawingml/2006/main" xmlns:r="http://schemas.openxmlformats.org/officeDocument/2006/relationships" xmlns:p="http://schemas.openxmlformats.org/presentationml/2006/main">
   <p:cSld name="Slide 10">
     <p:spTree>
       <p:nvGrpSpPr>
@@ -3029,7 +3389,7 @@
           </a:prstGeom>
           <a:extLst>
             <a:ext uri="{C572A759-6A51-4108-AA02-DFA0A04FC94B}">
-              <ma14:wrappingTextBoxFlag xmlns:ma14="http://schemas.microsoft.com/office/mac/drawingml/2011/main" xmlns="" val="0"/>
+              <ma14:wrappingTextBoxFlag xmlns="" xmlns:ma14="http://schemas.microsoft.com/office/mac/drawingml/2011/main" val="0"/>
             </a:ext>
           </a:extLst>
         </p:spPr>
@@ -3051,7 +3411,7 @@
             <a:pPr algn="r"/>
             <a:fld id="{F7021451-1387-4CA6-816F-3879F97B5CBC}" type="slidenum">
               <a:rPr lang="en-US" b="0"/>
-              <a:t>10</a:t>
+              <a:t>11</a:t>
             </a:fld>
             <a:endParaRPr lang="en-US"/>
           </a:p>
@@ -3065,7 +3425,7 @@
 </p:sld>
 </file>
 
-<file path=ppt/slides/slide11.xml><?xml version="1.0" encoding="utf-8"?>
+<file path=ppt/slides/slide12.xml><?xml version="1.0" encoding="utf-8"?>
 <p:sld xmlns:a="http://schemas.openxmlformats.org/drawingml/2006/main" xmlns:r="http://schemas.openxmlformats.org/officeDocument/2006/relationships" xmlns:p="http://schemas.openxmlformats.org/presentationml/2006/main">
   <p:cSld name="Slide 11">
     <p:bg>
@@ -3181,7 +3541,7 @@
           </a:prstGeom>
           <a:extLst>
             <a:ext uri="{C572A759-6A51-4108-AA02-DFA0A04FC94B}">
-              <ma14:wrappingTextBoxFlag xmlns:ma14="http://schemas.microsoft.com/office/mac/drawingml/2011/main" xmlns="" val="0"/>
+              <ma14:wrappingTextBoxFlag xmlns="" xmlns:ma14="http://schemas.microsoft.com/office/mac/drawingml/2011/main" val="0"/>
             </a:ext>
           </a:extLst>
         </p:spPr>
@@ -3203,7 +3563,7 @@
             <a:pPr algn="r"/>
             <a:fld id="{F7021451-1387-4CA6-816F-3879F97B5CBC}" type="slidenum">
               <a:rPr lang="en-US" b="0"/>
-              <a:t>11</a:t>
+              <a:t>12</a:t>
             </a:fld>
             <a:endParaRPr lang="en-US"/>
           </a:p>
@@ -3217,7 +3577,7 @@
 </p:sld>
 </file>
 
-<file path=ppt/slides/slide12.xml><?xml version="1.0" encoding="utf-8"?>
+<file path=ppt/slides/slide13.xml><?xml version="1.0" encoding="utf-8"?>
 <p:sld xmlns:a="http://schemas.openxmlformats.org/drawingml/2006/main" xmlns:r="http://schemas.openxmlformats.org/officeDocument/2006/relationships" xmlns:p="http://schemas.openxmlformats.org/presentationml/2006/main">
   <p:cSld name="Slide 12">
     <p:spTree>
@@ -3601,7 +3961,7 @@
           </a:prstGeom>
           <a:extLst>
             <a:ext uri="{C572A759-6A51-4108-AA02-DFA0A04FC94B}">
-              <ma14:wrappingTextBoxFlag xmlns:ma14="http://schemas.microsoft.com/office/mac/drawingml/2011/main" xmlns="" val="0"/>
+              <ma14:wrappingTextBoxFlag xmlns="" xmlns:ma14="http://schemas.microsoft.com/office/mac/drawingml/2011/main" val="0"/>
             </a:ext>
           </a:extLst>
         </p:spPr>
@@ -3623,7 +3983,7 @@
             <a:pPr algn="r"/>
             <a:fld id="{F7021451-1387-4CA6-816F-3879F97B5CBC}" type="slidenum">
               <a:rPr lang="en-US" b="0"/>
-              <a:t>12</a:t>
+              <a:t>13</a:t>
             </a:fld>
             <a:endParaRPr lang="en-US"/>
           </a:p>
@@ -3637,7 +3997,7 @@
 </p:sld>
 </file>
 
-<file path=ppt/slides/slide13.xml><?xml version="1.0" encoding="utf-8"?>
+<file path=ppt/slides/slide14.xml><?xml version="1.0" encoding="utf-8"?>
 <p:sld xmlns:a="http://schemas.openxmlformats.org/drawingml/2006/main" xmlns:r="http://schemas.openxmlformats.org/officeDocument/2006/relationships" xmlns:p="http://schemas.openxmlformats.org/presentationml/2006/main">
   <p:cSld name="Slide 13">
     <p:bg>
@@ -3876,7 +4236,7 @@
           </a:prstGeom>
           <a:extLst>
             <a:ext uri="{C572A759-6A51-4108-AA02-DFA0A04FC94B}">
-              <ma14:wrappingTextBoxFlag xmlns:ma14="http://schemas.microsoft.com/office/mac/drawingml/2011/main" xmlns="" val="0"/>
+              <ma14:wrappingTextBoxFlag xmlns="" xmlns:ma14="http://schemas.microsoft.com/office/mac/drawingml/2011/main" val="0"/>
             </a:ext>
           </a:extLst>
         </p:spPr>
@@ -3898,7 +4258,7 @@
             <a:pPr algn="r"/>
             <a:fld id="{F7021451-1387-4CA6-816F-3879F97B5CBC}" type="slidenum">
               <a:rPr lang="en-US" b="0"/>
-              <a:t>13</a:t>
+              <a:t>14</a:t>
             </a:fld>
             <a:endParaRPr lang="en-US"/>
           </a:p>
@@ -3912,7 +4272,7 @@
 </p:sld>
 </file>
 
-<file path=ppt/slides/slide14.xml><?xml version="1.0" encoding="utf-8"?>
+<file path=ppt/slides/slide15.xml><?xml version="1.0" encoding="utf-8"?>
 <p:sld xmlns:a="http://schemas.openxmlformats.org/drawingml/2006/main" xmlns:r="http://schemas.openxmlformats.org/officeDocument/2006/relationships" xmlns:p="http://schemas.openxmlformats.org/presentationml/2006/main">
   <p:cSld name="Slide 14">
     <p:spTree>
@@ -4222,7 +4582,7 @@
           </a:prstGeom>
           <a:extLst>
             <a:ext uri="{C572A759-6A51-4108-AA02-DFA0A04FC94B}">
-              <ma14:wrappingTextBoxFlag xmlns:ma14="http://schemas.microsoft.com/office/mac/drawingml/2011/main" xmlns="" val="0"/>
+              <ma14:wrappingTextBoxFlag xmlns="" xmlns:ma14="http://schemas.microsoft.com/office/mac/drawingml/2011/main" val="0"/>
             </a:ext>
           </a:extLst>
         </p:spPr>
@@ -4244,7 +4604,7 @@
             <a:pPr algn="r"/>
             <a:fld id="{F7021451-1387-4CA6-816F-3879F97B5CBC}" type="slidenum">
               <a:rPr lang="en-US" b="0"/>
-              <a:t>14</a:t>
+              <a:t>15</a:t>
             </a:fld>
             <a:endParaRPr lang="en-US"/>
           </a:p>
@@ -4506,7 +4866,7 @@
           </a:prstGeom>
           <a:extLst>
             <a:ext uri="{C572A759-6A51-4108-AA02-DFA0A04FC94B}">
-              <ma14:wrappingTextBoxFlag xmlns:ma14="http://schemas.microsoft.com/office/mac/drawingml/2011/main" xmlns="" val="0"/>
+              <ma14:wrappingTextBoxFlag xmlns="" xmlns:ma14="http://schemas.microsoft.com/office/mac/drawingml/2011/main" val="0"/>
             </a:ext>
           </a:extLst>
         </p:spPr>
@@ -4866,7 +5226,7 @@
           </a:prstGeom>
           <a:extLst>
             <a:ext uri="{C572A759-6A51-4108-AA02-DFA0A04FC94B}">
-              <ma14:wrappingTextBoxFlag xmlns:ma14="http://schemas.microsoft.com/office/mac/drawingml/2011/main" xmlns="" val="0"/>
+              <ma14:wrappingTextBoxFlag xmlns="" xmlns:ma14="http://schemas.microsoft.com/office/mac/drawingml/2011/main" val="0"/>
             </a:ext>
           </a:extLst>
         </p:spPr>
@@ -5077,6 +5437,109 @@
 
 <file path=ppt/slides/slide4.xml><?xml version="1.0" encoding="utf-8"?>
 <p:sld xmlns:a="http://schemas.openxmlformats.org/drawingml/2006/main" xmlns:r="http://schemas.openxmlformats.org/officeDocument/2006/relationships" xmlns:p="http://schemas.openxmlformats.org/presentationml/2006/main">
+  <p:cSld>
+    <p:spTree>
+      <p:nvGrpSpPr>
+        <p:cNvPr id="1" name=""/>
+        <p:cNvGrpSpPr/>
+        <p:nvPr/>
+      </p:nvGrpSpPr>
+      <p:grpSpPr>
+        <a:xfrm>
+          <a:off x="0" y="0"/>
+          <a:ext cx="0" cy="0"/>
+          <a:chOff x="0" y="0"/>
+          <a:chExt cx="0" cy="0"/>
+        </a:xfrm>
+      </p:grpSpPr>
+      <p:pic>
+        <p:nvPicPr>
+          <p:cNvPr id="2" name="Picture 1">
+            <a:extLst>
+              <a:ext uri="{FF2B5EF4-FFF2-40B4-BE49-F238E27FC236}">
+                <a16:creationId xmlns:a16="http://schemas.microsoft.com/office/drawing/2014/main" id="{1C2C159E-5DF6-5E6E-5DB9-918F059B5557}"/>
+              </a:ext>
+            </a:extLst>
+          </p:cNvPr>
+          <p:cNvPicPr>
+            <a:picLocks noChangeAspect="1"/>
+          </p:cNvPicPr>
+          <p:nvPr/>
+        </p:nvPicPr>
+        <p:blipFill>
+          <a:blip r:embed="rId2"/>
+          <a:stretch>
+            <a:fillRect/>
+          </a:stretch>
+        </p:blipFill>
+        <p:spPr>
+          <a:xfrm>
+            <a:off x="1143000" y="857747"/>
+            <a:ext cx="6858000" cy="3429000"/>
+          </a:xfrm>
+          <a:prstGeom prst="rect">
+            <a:avLst/>
+          </a:prstGeom>
+        </p:spPr>
+      </p:pic>
+      <p:sp>
+        <p:nvSpPr>
+          <p:cNvPr id="4" name="TextBox 3">
+            <a:extLst>
+              <a:ext uri="{FF2B5EF4-FFF2-40B4-BE49-F238E27FC236}">
+                <a16:creationId xmlns:a16="http://schemas.microsoft.com/office/drawing/2014/main" id="{D30E0CD6-9D85-F3BC-7C37-BD9BACC536BF}"/>
+              </a:ext>
+            </a:extLst>
+          </p:cNvPr>
+          <p:cNvSpPr txBox="1"/>
+          <p:nvPr/>
+        </p:nvSpPr>
+        <p:spPr>
+          <a:xfrm>
+            <a:off x="2627906" y="3759831"/>
+            <a:ext cx="4572000" cy="646331"/>
+          </a:xfrm>
+          <a:prstGeom prst="rect">
+            <a:avLst/>
+          </a:prstGeom>
+          <a:noFill/>
+        </p:spPr>
+        <p:txBody>
+          <a:bodyPr wrap="square">
+            <a:spAutoFit/>
+          </a:bodyPr>
+          <a:lstStyle/>
+          <a:p>
+            <a:r>
+              <a:rPr lang="en-US" dirty="0"/>
+              <a:t>RL-tuned transformer classifier that emits calibrated </a:t>
+            </a:r>
+            <a:r>
+              <a:rPr lang="en-US" dirty="0" err="1"/>
+              <a:t>softmaxes</a:t>
+            </a:r>
+            <a:r>
+              <a:rPr lang="en-US" dirty="0"/>
+              <a:t> in one forward pass. </a:t>
+            </a:r>
+          </a:p>
+        </p:txBody>
+      </p:sp>
+    </p:spTree>
+    <p:extLst>
+      <p:ext uri="{BB962C8B-B14F-4D97-AF65-F5344CB8AC3E}">
+        <p14:creationId xmlns:p14="http://schemas.microsoft.com/office/powerpoint/2010/main" val="729452607"/>
+      </p:ext>
+    </p:extLst>
+  </p:cSld>
+  <p:clrMapOvr>
+    <a:masterClrMapping/>
+  </p:clrMapOvr>
+</p:sld>
+</file>
+
+<file path=ppt/slides/slide5.xml><?xml version="1.0" encoding="utf-8"?>
+<p:sld xmlns:a="http://schemas.openxmlformats.org/drawingml/2006/main" xmlns:r="http://schemas.openxmlformats.org/officeDocument/2006/relationships" xmlns:p="http://schemas.openxmlformats.org/presentationml/2006/main">
   <p:cSld name="Slide 4">
     <p:spTree>
       <p:nvGrpSpPr>
@@ -5121,6 +5584,10 @@
               <a:buNone/>
             </a:pPr>
             <a:r>
+              <a:rPr lang="en-US" dirty="0"/>
+              <a:t>When</a:t>
+            </a:r>
+            <a:r>
               <a:rPr lang="en-US" sz="2800" b="1" dirty="0">
                 <a:solidFill>
                   <a:srgbClr val="1F2933"/>
@@ -5129,7 +5596,7 @@
                 <a:ea typeface="Cambria" pitchFamily="34" charset="-122"/>
                 <a:cs typeface="Cambria" pitchFamily="34" charset="-120"/>
               </a:rPr>
-              <a:t>If big AI labs build our AI…</a:t>
+              <a:t> big AI labs build our AI…</a:t>
             </a:r>
             <a:endParaRPr lang="en-US" sz="2800" dirty="0"/>
           </a:p>
@@ -5709,7 +6176,7 @@
           </a:prstGeom>
           <a:extLst>
             <a:ext uri="{C572A759-6A51-4108-AA02-DFA0A04FC94B}">
-              <ma14:wrappingTextBoxFlag xmlns:ma14="http://schemas.microsoft.com/office/mac/drawingml/2011/main" xmlns="" val="0"/>
+              <ma14:wrappingTextBoxFlag xmlns="" xmlns:ma14="http://schemas.microsoft.com/office/mac/drawingml/2011/main" val="0"/>
             </a:ext>
           </a:extLst>
         </p:spPr>
@@ -5731,7 +6198,7 @@
             <a:pPr algn="r"/>
             <a:fld id="{F7021451-1387-4CA6-816F-3879F97B5CBC}" type="slidenum">
               <a:rPr lang="en-US" b="0"/>
-              <a:t>4</a:t>
+              <a:t>5</a:t>
             </a:fld>
             <a:endParaRPr lang="en-US"/>
           </a:p>
@@ -5745,7 +6212,7 @@
 </p:sld>
 </file>
 
-<file path=ppt/slides/slide5.xml><?xml version="1.0" encoding="utf-8"?>
+<file path=ppt/slides/slide6.xml><?xml version="1.0" encoding="utf-8"?>
 <p:sld xmlns:a="http://schemas.openxmlformats.org/drawingml/2006/main" xmlns:r="http://schemas.openxmlformats.org/officeDocument/2006/relationships" xmlns:p="http://schemas.openxmlformats.org/presentationml/2006/main">
   <p:cSld name="Slide 5">
     <p:spTree>
@@ -6115,236 +6582,6 @@
       </p:sp>
       <p:sp>
         <p:nvSpPr>
-          <p:cNvPr id="11" name="Shape 9"/>
-          <p:cNvSpPr/>
-          <p:nvPr/>
-        </p:nvSpPr>
-        <p:spPr>
-          <a:xfrm>
-            <a:off x="6071616" y="1005840"/>
-            <a:ext cx="2615184" cy="3017520"/>
-          </a:xfrm>
-          <a:prstGeom prst="roundRect">
-            <a:avLst>
-              <a:gd name="adj" fmla="val 2797"/>
-            </a:avLst>
-          </a:prstGeom>
-          <a:solidFill>
-            <a:srgbClr val="E6ECF0"/>
-          </a:solidFill>
-          <a:ln/>
-        </p:spPr>
-        <p:txBody>
-          <a:bodyPr/>
-          <a:lstStyle/>
-          <a:p>
-            <a:endParaRPr lang="en-US"/>
-          </a:p>
-        </p:txBody>
-      </p:sp>
-      <p:sp>
-        <p:nvSpPr>
-          <p:cNvPr id="12" name="Text 10"/>
-          <p:cNvSpPr txBox="1"/>
-          <p:nvPr/>
-        </p:nvSpPr>
-        <p:spPr>
-          <a:xfrm>
-            <a:off x="6254496" y="1143000"/>
-            <a:ext cx="2249424" cy="640080"/>
-          </a:xfrm>
-          <a:prstGeom prst="rect">
-            <a:avLst/>
-          </a:prstGeom>
-          <a:noFill/>
-          <a:ln/>
-        </p:spPr>
-        <p:txBody>
-          <a:bodyPr wrap="square" lIns="0" tIns="0" rIns="0" bIns="0" rtlCol="0" anchor="t"/>
-          <a:lstStyle/>
-          <a:p>
-            <a:pPr marL="0" indent="0">
-              <a:buNone/>
-            </a:pPr>
-            <a:r>
-              <a:rPr lang="en-US" sz="1800" b="1" dirty="0">
-                <a:solidFill>
-                  <a:srgbClr val="A44A3F"/>
-                </a:solidFill>
-                <a:latin typeface="Cambria" pitchFamily="34" charset="0"/>
-                <a:ea typeface="Cambria" pitchFamily="34" charset="-122"/>
-                <a:cs typeface="Cambria" pitchFamily="34" charset="-120"/>
-              </a:rPr>
-              <a:t>DRR = 1 − I/R</a:t>
-            </a:r>
-            <a:endParaRPr lang="en-US" sz="1800" dirty="0"/>
-          </a:p>
-        </p:txBody>
-      </p:sp>
-      <p:sp>
-        <p:nvSpPr>
-          <p:cNvPr id="13" name="Text 11"/>
-          <p:cNvSpPr txBox="1"/>
-          <p:nvPr/>
-        </p:nvSpPr>
-        <p:spPr>
-          <a:xfrm>
-            <a:off x="6254496" y="1810512"/>
-            <a:ext cx="2249424" cy="1280160"/>
-          </a:xfrm>
-          <a:prstGeom prst="rect">
-            <a:avLst/>
-          </a:prstGeom>
-          <a:noFill/>
-          <a:ln/>
-        </p:spPr>
-        <p:txBody>
-          <a:bodyPr wrap="square" lIns="0" tIns="0" rIns="0" bIns="0" rtlCol="0" anchor="t"/>
-          <a:lstStyle/>
-          <a:p>
-            <a:pPr marL="0" indent="0">
-              <a:buNone/>
-            </a:pPr>
-            <a:r>
-              <a:rPr lang="en-US" sz="1500" dirty="0">
-                <a:solidFill>
-                  <a:srgbClr val="1F2933"/>
-                </a:solidFill>
-              </a:rPr>
-              <a:t>Share of the R raw columns that the data does not need.</a:t>
-            </a:r>
-            <a:endParaRPr lang="en-US" sz="1500" dirty="0"/>
-          </a:p>
-        </p:txBody>
-      </p:sp>
-      <p:sp>
-        <p:nvSpPr>
-          <p:cNvPr id="14" name="Text 12"/>
-          <p:cNvSpPr txBox="1"/>
-          <p:nvPr/>
-        </p:nvSpPr>
-        <p:spPr>
-          <a:xfrm>
-            <a:off x="6254496" y="3200400"/>
-            <a:ext cx="2249424" cy="685800"/>
-          </a:xfrm>
-          <a:prstGeom prst="rect">
-            <a:avLst/>
-          </a:prstGeom>
-          <a:noFill/>
-          <a:ln/>
-        </p:spPr>
-        <p:txBody>
-          <a:bodyPr wrap="square" lIns="0" tIns="0" rIns="0" bIns="0" rtlCol="0" anchor="b"/>
-          <a:lstStyle/>
-          <a:p>
-            <a:pPr marL="0" indent="0">
-              <a:buNone/>
-            </a:pPr>
-            <a:r>
-              <a:rPr lang="en-US" sz="1400" b="1" dirty="0">
-                <a:solidFill>
-                  <a:srgbClr val="3D6B8C"/>
-                </a:solidFill>
-              </a:rPr>
-              <a:t>DRR &gt; 0.35: 30 evaluations suffice</a:t>
-            </a:r>
-            <a:endParaRPr lang="en-US" sz="1400" dirty="0"/>
-          </a:p>
-          <a:p>
-            <a:pPr marL="0" indent="0">
-              <a:buNone/>
-            </a:pPr>
-            <a:r>
-              <a:rPr lang="en-US" sz="1400" dirty="0">
-                <a:solidFill>
-                  <a:srgbClr val="5C6B73"/>
-                </a:solidFill>
-              </a:rPr>
-              <a:t>[Lustosa, TSE'26]</a:t>
-            </a:r>
-            <a:endParaRPr lang="en-US" sz="1400" dirty="0"/>
-          </a:p>
-        </p:txBody>
-      </p:sp>
-      <p:sp>
-        <p:nvSpPr>
-          <p:cNvPr id="15" name="Text 13"/>
-          <p:cNvSpPr txBox="1"/>
-          <p:nvPr/>
-        </p:nvSpPr>
-        <p:spPr>
-          <a:xfrm>
-            <a:off x="457200" y="4160520"/>
-            <a:ext cx="8229600" cy="365760"/>
-          </a:xfrm>
-          <a:prstGeom prst="rect">
-            <a:avLst/>
-          </a:prstGeom>
-          <a:noFill/>
-          <a:ln/>
-        </p:spPr>
-        <p:txBody>
-          <a:bodyPr wrap="square" lIns="0" tIns="0" rIns="0" bIns="0" rtlCol="0" anchor="t"/>
-          <a:lstStyle/>
-          <a:p>
-            <a:pPr marL="0" indent="0">
-              <a:buNone/>
-            </a:pPr>
-            <a:r>
-              <a:rPr lang="en-US" sz="1400" b="1" dirty="0">
-                <a:solidFill>
-                  <a:srgbClr val="A44A3F"/>
-                </a:solidFill>
-              </a:rPr>
-              <a:t>LITE</a:t>
-            </a:r>
-            <a:r>
-              <a:rPr lang="en-US" sz="1400" dirty="0">
-                <a:solidFill>
-                  <a:srgbClr val="1F2933"/>
-                </a:solidFill>
-              </a:rPr>
-              <a:t> = 30-evaluation optimizer.   </a:t>
-            </a:r>
-            <a:r>
-              <a:rPr lang="en-US" sz="1400" b="1" dirty="0">
-                <a:solidFill>
-                  <a:srgbClr val="A44A3F"/>
-                </a:solidFill>
-              </a:rPr>
-              <a:t>DEHB</a:t>
-            </a:r>
-            <a:r>
-              <a:rPr lang="en-US" sz="1400" dirty="0">
-                <a:solidFill>
-                  <a:srgbClr val="1F2933"/>
-                </a:solidFill>
-              </a:rPr>
-              <a:t> = 3,000-evaluation state of the art.   </a:t>
-            </a:r>
-            <a:r>
-              <a:rPr lang="en-US" sz="1400" b="1" dirty="0">
-                <a:solidFill>
-                  <a:srgbClr val="A44A3F"/>
-                </a:solidFill>
-              </a:rPr>
-              <a:t>d2h</a:t>
-            </a:r>
-            <a:r>
-              <a:rPr lang="en-US" sz="1400" dirty="0">
-                <a:solidFill>
-                  <a:srgbClr val="1F2933"/>
-                </a:solidFill>
-              </a:rPr>
-              <a:t> = distance to ideal (lower is better).</a:t>
-            </a:r>
-            <a:endParaRPr lang="en-US" sz="1400" dirty="0"/>
-          </a:p>
-        </p:txBody>
-      </p:sp>
-      <p:sp>
-        <p:nvSpPr>
           <p:cNvPr id="25" name="Slide Number Placeholder 0"/>
           <p:cNvSpPr>
             <a:spLocks noGrp="1"/>
@@ -6363,7 +6600,7 @@
           </a:prstGeom>
           <a:extLst>
             <a:ext uri="{C572A759-6A51-4108-AA02-DFA0A04FC94B}">
-              <ma14:wrappingTextBoxFlag xmlns:ma14="http://schemas.microsoft.com/office/mac/drawingml/2011/main" xmlns="" val="0"/>
+              <ma14:wrappingTextBoxFlag xmlns="" xmlns:ma14="http://schemas.microsoft.com/office/mac/drawingml/2011/main" val="0"/>
             </a:ext>
           </a:extLst>
         </p:spPr>
@@ -6385,12 +6622,72 @@
             <a:pPr algn="r"/>
             <a:fld id="{F7021451-1387-4CA6-816F-3879F97B5CBC}" type="slidenum">
               <a:rPr lang="en-US" b="0"/>
-              <a:t>5</a:t>
+              <a:t>6</a:t>
             </a:fld>
             <a:endParaRPr lang="en-US"/>
           </a:p>
         </p:txBody>
       </p:sp>
+      <p:pic>
+        <p:nvPicPr>
+          <p:cNvPr id="17" name="Picture 16">
+            <a:extLst>
+              <a:ext uri="{FF2B5EF4-FFF2-40B4-BE49-F238E27FC236}">
+                <a16:creationId xmlns:a16="http://schemas.microsoft.com/office/drawing/2014/main" id="{1772011E-F22D-B07A-D4BF-73FF1B9D4CAF}"/>
+              </a:ext>
+            </a:extLst>
+          </p:cNvPr>
+          <p:cNvPicPr>
+            <a:picLocks noChangeAspect="1"/>
+          </p:cNvPicPr>
+          <p:nvPr/>
+        </p:nvPicPr>
+        <p:blipFill>
+          <a:blip r:embed="rId3"/>
+          <a:stretch>
+            <a:fillRect/>
+          </a:stretch>
+        </p:blipFill>
+        <p:spPr>
+          <a:xfrm>
+            <a:off x="6025640" y="2732709"/>
+            <a:ext cx="2853184" cy="1724991"/>
+          </a:xfrm>
+          <a:prstGeom prst="rect">
+            <a:avLst/>
+          </a:prstGeom>
+        </p:spPr>
+      </p:pic>
+      <p:pic>
+        <p:nvPicPr>
+          <p:cNvPr id="16" name="Picture 15">
+            <a:extLst>
+              <a:ext uri="{FF2B5EF4-FFF2-40B4-BE49-F238E27FC236}">
+                <a16:creationId xmlns:a16="http://schemas.microsoft.com/office/drawing/2014/main" id="{F6F75ED2-3A19-C64C-DEBD-5DC56E4A4B1B}"/>
+              </a:ext>
+            </a:extLst>
+          </p:cNvPr>
+          <p:cNvPicPr>
+            <a:picLocks noChangeAspect="1"/>
+          </p:cNvPicPr>
+          <p:nvPr/>
+        </p:nvPicPr>
+        <p:blipFill>
+          <a:blip r:embed="rId4"/>
+          <a:stretch>
+            <a:fillRect/>
+          </a:stretch>
+        </p:blipFill>
+        <p:spPr>
+          <a:xfrm>
+            <a:off x="6071616" y="717381"/>
+            <a:ext cx="2874373" cy="2056527"/>
+          </a:xfrm>
+          <a:prstGeom prst="rect">
+            <a:avLst/>
+          </a:prstGeom>
+        </p:spPr>
+      </p:pic>
     </p:spTree>
   </p:cSld>
   <p:clrMapOvr>
@@ -6399,7 +6696,976 @@
 </p:sld>
 </file>
 
-<file path=ppt/slides/slide6.xml><?xml version="1.0" encoding="utf-8"?>
+<file path=ppt/slides/slide7.xml><?xml version="1.0" encoding="utf-8"?>
+<p:sld xmlns:a="http://schemas.openxmlformats.org/drawingml/2006/main" xmlns:r="http://schemas.openxmlformats.org/officeDocument/2006/relationships" xmlns:p="http://schemas.openxmlformats.org/presentationml/2006/main">
+  <p:cSld>
+    <p:spTree>
+      <p:nvGrpSpPr>
+        <p:cNvPr id="1" name="">
+          <a:extLst>
+            <a:ext uri="{FF2B5EF4-FFF2-40B4-BE49-F238E27FC236}">
+              <a16:creationId xmlns:a16="http://schemas.microsoft.com/office/drawing/2014/main" id="{5EC73271-259E-81F2-4DA0-C27E79EDA183}"/>
+            </a:ext>
+          </a:extLst>
+        </p:cNvPr>
+        <p:cNvGrpSpPr/>
+        <p:nvPr/>
+      </p:nvGrpSpPr>
+      <p:grpSpPr>
+        <a:xfrm>
+          <a:off x="0" y="0"/>
+          <a:ext cx="0" cy="0"/>
+          <a:chOff x="0" y="0"/>
+          <a:chExt cx="0" cy="0"/>
+        </a:xfrm>
+      </p:grpSpPr>
+      <p:sp>
+        <p:nvSpPr>
+          <p:cNvPr id="2" name="Text 0">
+            <a:extLst>
+              <a:ext uri="{FF2B5EF4-FFF2-40B4-BE49-F238E27FC236}">
+                <a16:creationId xmlns:a16="http://schemas.microsoft.com/office/drawing/2014/main" id="{DD3CF395-08A7-38F2-DADC-9C17E20B538F}"/>
+              </a:ext>
+            </a:extLst>
+          </p:cNvPr>
+          <p:cNvSpPr>
+            <a:spLocks noGrp="1"/>
+          </p:cNvSpPr>
+          <p:nvPr>
+            <p:ph type="title" idx="100" hasCustomPrompt="1"/>
+          </p:nvPr>
+        </p:nvSpPr>
+        <p:spPr>
+          <a:xfrm>
+            <a:off x="457200" y="274320"/>
+            <a:ext cx="8229600" cy="640080"/>
+          </a:xfrm>
+          <a:prstGeom prst="rect">
+            <a:avLst/>
+          </a:prstGeom>
+          <a:noFill/>
+          <a:ln/>
+        </p:spPr>
+        <p:txBody>
+          <a:bodyPr wrap="square" lIns="0" tIns="0" rIns="0" bIns="0" rtlCol="0" anchor="t"/>
+          <a:lstStyle/>
+          <a:p>
+            <a:pPr marL="0" indent="0" algn="l">
+              <a:buNone/>
+            </a:pPr>
+            <a:r>
+              <a:rPr lang="en-US" sz="2800" b="1" dirty="0">
+                <a:solidFill>
+                  <a:srgbClr val="1F2933"/>
+                </a:solidFill>
+                <a:latin typeface="Cambria" pitchFamily="34" charset="0"/>
+                <a:ea typeface="Cambria" pitchFamily="34" charset="-122"/>
+                <a:cs typeface="Cambria" pitchFamily="34" charset="-120"/>
+              </a:rPr>
+              <a:t>What the red terms mean</a:t>
+            </a:r>
+            <a:endParaRPr lang="en-US" sz="2800" dirty="0"/>
+          </a:p>
+        </p:txBody>
+      </p:sp>
+      <p:sp>
+        <p:nvSpPr>
+          <p:cNvPr id="3" name="Shape 1">
+            <a:extLst>
+              <a:ext uri="{FF2B5EF4-FFF2-40B4-BE49-F238E27FC236}">
+                <a16:creationId xmlns:a16="http://schemas.microsoft.com/office/drawing/2014/main" id="{889F55F2-54F0-FD31-7739-EE6F8A8B4CA2}"/>
+              </a:ext>
+            </a:extLst>
+          </p:cNvPr>
+          <p:cNvSpPr/>
+          <p:nvPr/>
+        </p:nvSpPr>
+        <p:spPr>
+          <a:xfrm>
+            <a:off x="457200" y="1005840"/>
+            <a:ext cx="2615184" cy="3017520"/>
+          </a:xfrm>
+          <a:prstGeom prst="roundRect">
+            <a:avLst>
+              <a:gd name="adj" fmla="val 2797"/>
+            </a:avLst>
+          </a:prstGeom>
+          <a:solidFill>
+            <a:srgbClr val="E6ECF0"/>
+          </a:solidFill>
+          <a:ln/>
+        </p:spPr>
+        <p:txBody>
+          <a:bodyPr/>
+          <a:lstStyle/>
+          <a:p>
+            <a:endParaRPr lang="en-US"/>
+          </a:p>
+        </p:txBody>
+      </p:sp>
+      <p:sp>
+        <p:nvSpPr>
+          <p:cNvPr id="4" name="Text 2">
+            <a:extLst>
+              <a:ext uri="{FF2B5EF4-FFF2-40B4-BE49-F238E27FC236}">
+                <a16:creationId xmlns:a16="http://schemas.microsoft.com/office/drawing/2014/main" id="{066412FF-3B34-6EF2-296D-AE6F49E059B8}"/>
+              </a:ext>
+            </a:extLst>
+          </p:cNvPr>
+          <p:cNvSpPr txBox="1"/>
+          <p:nvPr/>
+        </p:nvSpPr>
+        <p:spPr>
+          <a:xfrm>
+            <a:off x="640080" y="1143000"/>
+            <a:ext cx="2249424" cy="640080"/>
+          </a:xfrm>
+          <a:prstGeom prst="rect">
+            <a:avLst/>
+          </a:prstGeom>
+          <a:noFill/>
+          <a:ln/>
+        </p:spPr>
+        <p:txBody>
+          <a:bodyPr wrap="square" lIns="0" tIns="0" rIns="0" bIns="0" rtlCol="0" anchor="t"/>
+          <a:lstStyle/>
+          <a:p>
+            <a:pPr marL="0" indent="0">
+              <a:buNone/>
+            </a:pPr>
+            <a:r>
+              <a:rPr lang="en-US" sz="1800" b="1" dirty="0">
+                <a:solidFill>
+                  <a:srgbClr val="A44A3F"/>
+                </a:solidFill>
+                <a:latin typeface="Cambria" pitchFamily="34" charset="0"/>
+                <a:ea typeface="Cambria" pitchFamily="34" charset="-122"/>
+                <a:cs typeface="Cambria" pitchFamily="34" charset="-120"/>
+              </a:rPr>
+              <a:t>Intrinsic dimensionality (I)</a:t>
+            </a:r>
+            <a:endParaRPr lang="en-US" sz="1800" dirty="0"/>
+          </a:p>
+        </p:txBody>
+      </p:sp>
+      <p:sp>
+        <p:nvSpPr>
+          <p:cNvPr id="5" name="Text 3">
+            <a:extLst>
+              <a:ext uri="{FF2B5EF4-FFF2-40B4-BE49-F238E27FC236}">
+                <a16:creationId xmlns:a16="http://schemas.microsoft.com/office/drawing/2014/main" id="{81E4A850-36C7-AF8B-2FDA-827A3DC9C4B4}"/>
+              </a:ext>
+            </a:extLst>
+          </p:cNvPr>
+          <p:cNvSpPr txBox="1"/>
+          <p:nvPr/>
+        </p:nvSpPr>
+        <p:spPr>
+          <a:xfrm>
+            <a:off x="640080" y="1810512"/>
+            <a:ext cx="2249424" cy="1280160"/>
+          </a:xfrm>
+          <a:prstGeom prst="rect">
+            <a:avLst/>
+          </a:prstGeom>
+          <a:noFill/>
+          <a:ln/>
+        </p:spPr>
+        <p:txBody>
+          <a:bodyPr wrap="square" lIns="0" tIns="0" rIns="0" bIns="0" rtlCol="0" anchor="t"/>
+          <a:lstStyle/>
+          <a:p>
+            <a:pPr marL="0" indent="0">
+              <a:buNone/>
+            </a:pPr>
+            <a:r>
+              <a:rPr lang="en-US" sz="1500" dirty="0">
+                <a:solidFill>
+                  <a:srgbClr val="1F2933"/>
+                </a:solidFill>
+              </a:rPr>
+              <a:t>How many dimensions the data really uses. Rows along a road are 1-D, even in a 20-column table.</a:t>
+            </a:r>
+            <a:endParaRPr lang="en-US" sz="1500" dirty="0"/>
+          </a:p>
+        </p:txBody>
+      </p:sp>
+      <p:sp>
+        <p:nvSpPr>
+          <p:cNvPr id="6" name="Text 4">
+            <a:extLst>
+              <a:ext uri="{FF2B5EF4-FFF2-40B4-BE49-F238E27FC236}">
+                <a16:creationId xmlns:a16="http://schemas.microsoft.com/office/drawing/2014/main" id="{2E554E0D-94AF-4438-008B-12383B8B3841}"/>
+              </a:ext>
+            </a:extLst>
+          </p:cNvPr>
+          <p:cNvSpPr txBox="1"/>
+          <p:nvPr/>
+        </p:nvSpPr>
+        <p:spPr>
+          <a:xfrm>
+            <a:off x="640080" y="3200400"/>
+            <a:ext cx="2249424" cy="685800"/>
+          </a:xfrm>
+          <a:prstGeom prst="rect">
+            <a:avLst/>
+          </a:prstGeom>
+          <a:noFill/>
+          <a:ln/>
+        </p:spPr>
+        <p:txBody>
+          <a:bodyPr wrap="square" lIns="0" tIns="0" rIns="0" bIns="0" rtlCol="0" anchor="b"/>
+          <a:lstStyle/>
+          <a:p>
+            <a:pPr marL="0" indent="0">
+              <a:buNone/>
+            </a:pPr>
+            <a:r>
+              <a:rPr lang="en-US" sz="1400" b="1" dirty="0">
+                <a:solidFill>
+                  <a:srgbClr val="3D6B8C"/>
+                </a:solidFill>
+              </a:rPr>
+              <a:t>Median: SE 3.1, non-SE 5</a:t>
+            </a:r>
+            <a:endParaRPr lang="en-US" sz="1400" dirty="0"/>
+          </a:p>
+          <a:p>
+            <a:pPr marL="0" indent="0">
+              <a:buNone/>
+            </a:pPr>
+            <a:r>
+              <a:rPr lang="en-US" sz="1400" dirty="0">
+                <a:solidFill>
+                  <a:srgbClr val="5C6B73"/>
+                </a:solidFill>
+              </a:rPr>
+              <a:t>[Agrawal, TSE'22]</a:t>
+            </a:r>
+            <a:endParaRPr lang="en-US" sz="1400" dirty="0"/>
+          </a:p>
+        </p:txBody>
+      </p:sp>
+      <p:sp>
+        <p:nvSpPr>
+          <p:cNvPr id="7" name="Shape 5">
+            <a:extLst>
+              <a:ext uri="{FF2B5EF4-FFF2-40B4-BE49-F238E27FC236}">
+                <a16:creationId xmlns:a16="http://schemas.microsoft.com/office/drawing/2014/main" id="{5960E311-07A5-B252-BDCC-1DC59BFD3691}"/>
+              </a:ext>
+            </a:extLst>
+          </p:cNvPr>
+          <p:cNvSpPr/>
+          <p:nvPr/>
+        </p:nvSpPr>
+        <p:spPr>
+          <a:xfrm>
+            <a:off x="3264408" y="1005840"/>
+            <a:ext cx="2615184" cy="3017520"/>
+          </a:xfrm>
+          <a:prstGeom prst="roundRect">
+            <a:avLst>
+              <a:gd name="adj" fmla="val 2797"/>
+            </a:avLst>
+          </a:prstGeom>
+          <a:solidFill>
+            <a:srgbClr val="E6ECF0"/>
+          </a:solidFill>
+          <a:ln/>
+        </p:spPr>
+        <p:txBody>
+          <a:bodyPr/>
+          <a:lstStyle/>
+          <a:p>
+            <a:endParaRPr lang="en-US"/>
+          </a:p>
+        </p:txBody>
+      </p:sp>
+      <p:sp>
+        <p:nvSpPr>
+          <p:cNvPr id="8" name="Text 6">
+            <a:extLst>
+              <a:ext uri="{FF2B5EF4-FFF2-40B4-BE49-F238E27FC236}">
+                <a16:creationId xmlns:a16="http://schemas.microsoft.com/office/drawing/2014/main" id="{2961BD8D-C009-CE63-5BFB-C4683A7BB963}"/>
+              </a:ext>
+            </a:extLst>
+          </p:cNvPr>
+          <p:cNvSpPr txBox="1"/>
+          <p:nvPr/>
+        </p:nvSpPr>
+        <p:spPr>
+          <a:xfrm>
+            <a:off x="3447288" y="1143000"/>
+            <a:ext cx="2249424" cy="640080"/>
+          </a:xfrm>
+          <a:prstGeom prst="rect">
+            <a:avLst/>
+          </a:prstGeom>
+          <a:noFill/>
+          <a:ln/>
+        </p:spPr>
+        <p:txBody>
+          <a:bodyPr wrap="square" lIns="0" tIns="0" rIns="0" bIns="0" rtlCol="0" anchor="t"/>
+          <a:lstStyle/>
+          <a:p>
+            <a:pPr marL="0" indent="0">
+              <a:buNone/>
+            </a:pPr>
+            <a:r>
+              <a:rPr lang="en-US" sz="1800" b="1" dirty="0">
+                <a:solidFill>
+                  <a:srgbClr val="A44A3F"/>
+                </a:solidFill>
+                <a:latin typeface="Cambria" pitchFamily="34" charset="0"/>
+                <a:ea typeface="Cambria" pitchFamily="34" charset="-122"/>
+                <a:cs typeface="Cambria" pitchFamily="34" charset="-120"/>
+              </a:rPr>
+              <a:t>DODGE</a:t>
+            </a:r>
+            <a:endParaRPr lang="en-US" sz="1800" dirty="0"/>
+          </a:p>
+        </p:txBody>
+      </p:sp>
+      <p:sp>
+        <p:nvSpPr>
+          <p:cNvPr id="9" name="Text 7">
+            <a:extLst>
+              <a:ext uri="{FF2B5EF4-FFF2-40B4-BE49-F238E27FC236}">
+                <a16:creationId xmlns:a16="http://schemas.microsoft.com/office/drawing/2014/main" id="{31D4A621-C27C-AF28-A0C4-F93D8534018A}"/>
+              </a:ext>
+            </a:extLst>
+          </p:cNvPr>
+          <p:cNvSpPr txBox="1"/>
+          <p:nvPr/>
+        </p:nvSpPr>
+        <p:spPr>
+          <a:xfrm>
+            <a:off x="3447288" y="1810512"/>
+            <a:ext cx="2249424" cy="1280160"/>
+          </a:xfrm>
+          <a:prstGeom prst="rect">
+            <a:avLst/>
+          </a:prstGeom>
+          <a:noFill/>
+          <a:ln/>
+        </p:spPr>
+        <p:txBody>
+          <a:bodyPr wrap="square" lIns="0" tIns="0" rIns="0" bIns="0" rtlCol="0" anchor="t"/>
+          <a:lstStyle/>
+          <a:p>
+            <a:pPr marL="0" indent="0">
+              <a:buNone/>
+            </a:pPr>
+            <a:r>
+              <a:rPr lang="en-US" sz="1500" dirty="0">
+                <a:solidFill>
+                  <a:srgbClr val="1F2933"/>
+                </a:solidFill>
+              </a:rPr>
+              <a:t>Skips settings that score within ε of ones already seen. Stops after 30 evaluations.</a:t>
+            </a:r>
+            <a:endParaRPr lang="en-US" sz="1500" dirty="0"/>
+          </a:p>
+        </p:txBody>
+      </p:sp>
+      <p:sp>
+        <p:nvSpPr>
+          <p:cNvPr id="10" name="Text 8">
+            <a:extLst>
+              <a:ext uri="{FF2B5EF4-FFF2-40B4-BE49-F238E27FC236}">
+                <a16:creationId xmlns:a16="http://schemas.microsoft.com/office/drawing/2014/main" id="{621EA828-F91B-69E2-4A84-A485D27F94D0}"/>
+              </a:ext>
+            </a:extLst>
+          </p:cNvPr>
+          <p:cNvSpPr txBox="1"/>
+          <p:nvPr/>
+        </p:nvSpPr>
+        <p:spPr>
+          <a:xfrm>
+            <a:off x="3447288" y="3200400"/>
+            <a:ext cx="2249424" cy="685800"/>
+          </a:xfrm>
+          <a:prstGeom prst="rect">
+            <a:avLst/>
+          </a:prstGeom>
+          <a:noFill/>
+          <a:ln/>
+        </p:spPr>
+        <p:txBody>
+          <a:bodyPr wrap="square" lIns="0" tIns="0" rIns="0" bIns="0" rtlCol="0" anchor="b"/>
+          <a:lstStyle/>
+          <a:p>
+            <a:pPr marL="0" indent="0">
+              <a:buNone/>
+            </a:pPr>
+            <a:r>
+              <a:rPr lang="en-US" sz="1400" b="1" dirty="0">
+                <a:solidFill>
+                  <a:srgbClr val="3D6B8C"/>
+                </a:solidFill>
+              </a:rPr>
+              <a:t>Good on low-I data only</a:t>
+            </a:r>
+            <a:endParaRPr lang="en-US" sz="1400" dirty="0"/>
+          </a:p>
+          <a:p>
+            <a:pPr marL="0" indent="0">
+              <a:buNone/>
+            </a:pPr>
+            <a:r>
+              <a:rPr lang="en-US" sz="1400" dirty="0">
+                <a:solidFill>
+                  <a:srgbClr val="5C6B73"/>
+                </a:solidFill>
+              </a:rPr>
+              <a:t>[Agrawal, TSE'22]</a:t>
+            </a:r>
+            <a:endParaRPr lang="en-US" sz="1400" dirty="0"/>
+          </a:p>
+        </p:txBody>
+      </p:sp>
+      <p:sp>
+        <p:nvSpPr>
+          <p:cNvPr id="25" name="Slide Number Placeholder 0">
+            <a:extLst>
+              <a:ext uri="{FF2B5EF4-FFF2-40B4-BE49-F238E27FC236}">
+                <a16:creationId xmlns:a16="http://schemas.microsoft.com/office/drawing/2014/main" id="{E6AD1483-EC56-43B5-BC0F-CDB90D37E637}"/>
+              </a:ext>
+            </a:extLst>
+          </p:cNvPr>
+          <p:cNvSpPr>
+            <a:spLocks noGrp="1"/>
+          </p:cNvSpPr>
+          <p:nvPr>
+            <p:ph type="sldNum" sz="quarter" idx="4294967295"/>
+          </p:nvPr>
+        </p:nvSpPr>
+        <p:spPr>
+          <a:xfrm>
+            <a:off x="8229600" y="4754880"/>
+            <a:ext cx="502920" cy="274320"/>
+          </a:xfrm>
+          <a:prstGeom prst="rect">
+            <a:avLst/>
+          </a:prstGeom>
+          <a:extLst>
+            <a:ext uri="{C572A759-6A51-4108-AA02-DFA0A04FC94B}">
+              <ma14:wrappingTextBoxFlag xmlns="" xmlns:ma14="http://schemas.microsoft.com/office/mac/drawingml/2011/main" val="0"/>
+            </a:ext>
+          </a:extLst>
+        </p:spPr>
+        <p:txBody>
+          <a:bodyPr/>
+          <a:lstStyle>
+            <a:lvl1pPr>
+              <a:defRPr sz="1000">
+                <a:solidFill>
+                  <a:srgbClr val="5C6B73"/>
+                </a:solidFill>
+                <a:latin typeface="Calibri"/>
+                <a:ea typeface="Calibri"/>
+                <a:cs typeface="Calibri"/>
+              </a:defRPr>
+            </a:lvl1pPr>
+          </a:lstStyle>
+          <a:p>
+            <a:pPr algn="r"/>
+            <a:fld id="{F7021451-1387-4CA6-816F-3879F97B5CBC}" type="slidenum">
+              <a:rPr lang="en-US" b="0"/>
+              <a:t>7</a:t>
+            </a:fld>
+            <a:endParaRPr lang="en-US"/>
+          </a:p>
+        </p:txBody>
+      </p:sp>
+      <p:sp>
+        <p:nvSpPr>
+          <p:cNvPr id="18" name="Shape 9">
+            <a:extLst>
+              <a:ext uri="{FF2B5EF4-FFF2-40B4-BE49-F238E27FC236}">
+                <a16:creationId xmlns:a16="http://schemas.microsoft.com/office/drawing/2014/main" id="{A070471C-64E7-2B0E-5845-A7B1AD9885ED}"/>
+              </a:ext>
+            </a:extLst>
+          </p:cNvPr>
+          <p:cNvSpPr/>
+          <p:nvPr/>
+        </p:nvSpPr>
+        <p:spPr>
+          <a:xfrm>
+            <a:off x="6071616" y="1005840"/>
+            <a:ext cx="2615184" cy="3017520"/>
+          </a:xfrm>
+          <a:prstGeom prst="roundRect">
+            <a:avLst>
+              <a:gd name="adj" fmla="val 2797"/>
+            </a:avLst>
+          </a:prstGeom>
+          <a:solidFill>
+            <a:srgbClr val="E6ECF0"/>
+          </a:solidFill>
+          <a:ln/>
+        </p:spPr>
+        <p:txBody>
+          <a:bodyPr/>
+          <a:lstStyle/>
+          <a:p>
+            <a:endParaRPr lang="en-US" dirty="0"/>
+          </a:p>
+        </p:txBody>
+      </p:sp>
+      <p:sp>
+        <p:nvSpPr>
+          <p:cNvPr id="19" name="Text 10">
+            <a:extLst>
+              <a:ext uri="{FF2B5EF4-FFF2-40B4-BE49-F238E27FC236}">
+                <a16:creationId xmlns:a16="http://schemas.microsoft.com/office/drawing/2014/main" id="{6954210F-5D25-028D-1B01-F3D19847B350}"/>
+              </a:ext>
+            </a:extLst>
+          </p:cNvPr>
+          <p:cNvSpPr txBox="1"/>
+          <p:nvPr/>
+        </p:nvSpPr>
+        <p:spPr>
+          <a:xfrm>
+            <a:off x="6254496" y="1143000"/>
+            <a:ext cx="2249424" cy="640080"/>
+          </a:xfrm>
+          <a:prstGeom prst="rect">
+            <a:avLst/>
+          </a:prstGeom>
+          <a:noFill/>
+          <a:ln/>
+        </p:spPr>
+        <p:txBody>
+          <a:bodyPr wrap="square" lIns="0" tIns="0" rIns="0" bIns="0" rtlCol="0" anchor="t"/>
+          <a:lstStyle/>
+          <a:p>
+            <a:pPr marL="0" indent="0">
+              <a:buNone/>
+            </a:pPr>
+            <a:r>
+              <a:rPr lang="en-US" sz="1800" b="1" dirty="0">
+                <a:solidFill>
+                  <a:srgbClr val="A44A3F"/>
+                </a:solidFill>
+                <a:latin typeface="Cambria" pitchFamily="34" charset="0"/>
+                <a:ea typeface="Cambria" pitchFamily="34" charset="-122"/>
+                <a:cs typeface="Cambria" pitchFamily="34" charset="-120"/>
+              </a:rPr>
+              <a:t>DRR = 1 − I/R</a:t>
+            </a:r>
+            <a:endParaRPr lang="en-US" sz="1800" dirty="0"/>
+          </a:p>
+        </p:txBody>
+      </p:sp>
+      <p:sp>
+        <p:nvSpPr>
+          <p:cNvPr id="20" name="Text 11">
+            <a:extLst>
+              <a:ext uri="{FF2B5EF4-FFF2-40B4-BE49-F238E27FC236}">
+                <a16:creationId xmlns:a16="http://schemas.microsoft.com/office/drawing/2014/main" id="{6DFF86D4-185B-A91D-0340-C773A605FC98}"/>
+              </a:ext>
+            </a:extLst>
+          </p:cNvPr>
+          <p:cNvSpPr txBox="1"/>
+          <p:nvPr/>
+        </p:nvSpPr>
+        <p:spPr>
+          <a:xfrm>
+            <a:off x="6254496" y="1810512"/>
+            <a:ext cx="2249424" cy="1280160"/>
+          </a:xfrm>
+          <a:prstGeom prst="rect">
+            <a:avLst/>
+          </a:prstGeom>
+          <a:noFill/>
+          <a:ln/>
+        </p:spPr>
+        <p:txBody>
+          <a:bodyPr wrap="square" lIns="0" tIns="0" rIns="0" bIns="0" rtlCol="0" anchor="t"/>
+          <a:lstStyle/>
+          <a:p>
+            <a:pPr marL="0" indent="0">
+              <a:buNone/>
+            </a:pPr>
+            <a:r>
+              <a:rPr lang="en-US" sz="1500" dirty="0">
+                <a:solidFill>
+                  <a:srgbClr val="1F2933"/>
+                </a:solidFill>
+              </a:rPr>
+              <a:t>Share of the R raw columns that the data does not need.</a:t>
+            </a:r>
+            <a:endParaRPr lang="en-US" sz="1500" dirty="0"/>
+          </a:p>
+        </p:txBody>
+      </p:sp>
+      <p:sp>
+        <p:nvSpPr>
+          <p:cNvPr id="21" name="Text 12">
+            <a:extLst>
+              <a:ext uri="{FF2B5EF4-FFF2-40B4-BE49-F238E27FC236}">
+                <a16:creationId xmlns:a16="http://schemas.microsoft.com/office/drawing/2014/main" id="{7094C556-FBC8-DA4A-98D2-3C46043C94F6}"/>
+              </a:ext>
+            </a:extLst>
+          </p:cNvPr>
+          <p:cNvSpPr txBox="1"/>
+          <p:nvPr/>
+        </p:nvSpPr>
+        <p:spPr>
+          <a:xfrm>
+            <a:off x="6254496" y="3200400"/>
+            <a:ext cx="2249424" cy="685800"/>
+          </a:xfrm>
+          <a:prstGeom prst="rect">
+            <a:avLst/>
+          </a:prstGeom>
+          <a:noFill/>
+          <a:ln/>
+        </p:spPr>
+        <p:txBody>
+          <a:bodyPr wrap="square" lIns="0" tIns="0" rIns="0" bIns="0" rtlCol="0" anchor="b"/>
+          <a:lstStyle/>
+          <a:p>
+            <a:pPr marL="0" indent="0">
+              <a:buNone/>
+            </a:pPr>
+            <a:r>
+              <a:rPr lang="en-US" sz="1400" b="1" dirty="0">
+                <a:solidFill>
+                  <a:srgbClr val="3D6B8C"/>
+                </a:solidFill>
+              </a:rPr>
+              <a:t>DRR &gt; 0.35: 30 evaluations suffice</a:t>
+            </a:r>
+            <a:endParaRPr lang="en-US" sz="1400" dirty="0"/>
+          </a:p>
+          <a:p>
+            <a:pPr marL="0" indent="0">
+              <a:buNone/>
+            </a:pPr>
+            <a:r>
+              <a:rPr lang="en-US" sz="1400" dirty="0">
+                <a:solidFill>
+                  <a:srgbClr val="5C6B73"/>
+                </a:solidFill>
+              </a:rPr>
+              <a:t>[Lustosa, TSE'26]</a:t>
+            </a:r>
+            <a:endParaRPr lang="en-US" sz="1400" dirty="0"/>
+          </a:p>
+        </p:txBody>
+      </p:sp>
+    </p:spTree>
+    <p:extLst>
+      <p:ext uri="{BB962C8B-B14F-4D97-AF65-F5344CB8AC3E}">
+        <p14:creationId xmlns:p14="http://schemas.microsoft.com/office/powerpoint/2010/main" val="1074017916"/>
+      </p:ext>
+    </p:extLst>
+  </p:cSld>
+  <p:clrMapOvr>
+    <a:masterClrMapping/>
+  </p:clrMapOvr>
+</p:sld>
+</file>
+
+<file path=ppt/slides/slide8.xml><?xml version="1.0" encoding="utf-8"?>
+<p:sld xmlns:a="http://schemas.openxmlformats.org/drawingml/2006/main" xmlns:r="http://schemas.openxmlformats.org/officeDocument/2006/relationships" xmlns:p="http://schemas.openxmlformats.org/presentationml/2006/main">
+  <p:cSld name="Slide 7">
+    <p:spTree>
+      <p:nvGrpSpPr>
+        <p:cNvPr id="1" name=""/>
+        <p:cNvGrpSpPr/>
+        <p:nvPr/>
+      </p:nvGrpSpPr>
+      <p:grpSpPr>
+        <a:xfrm>
+          <a:off x="0" y="0"/>
+          <a:ext cx="0" cy="0"/>
+          <a:chOff x="0" y="0"/>
+          <a:chExt cx="0" cy="0"/>
+        </a:xfrm>
+      </p:grpSpPr>
+      <p:sp>
+        <p:nvSpPr>
+          <p:cNvPr id="2" name="Text 0"/>
+          <p:cNvSpPr>
+            <a:spLocks noGrp="1"/>
+          </p:cNvSpPr>
+          <p:nvPr>
+            <p:ph type="title" idx="100" hasCustomPrompt="1"/>
+          </p:nvPr>
+        </p:nvSpPr>
+        <p:spPr>
+          <a:xfrm>
+            <a:off x="457200" y="274320"/>
+            <a:ext cx="8229600" cy="640080"/>
+          </a:xfrm>
+          <a:prstGeom prst="rect">
+            <a:avLst/>
+          </a:prstGeom>
+          <a:noFill/>
+          <a:ln/>
+        </p:spPr>
+        <p:txBody>
+          <a:bodyPr wrap="square" lIns="0" tIns="0" rIns="0" bIns="0" rtlCol="0" anchor="t"/>
+          <a:lstStyle/>
+          <a:p>
+            <a:pPr marL="0" indent="0" algn="l">
+              <a:buNone/>
+            </a:pPr>
+            <a:r>
+              <a:rPr lang="en-US" sz="2800" b="1" dirty="0">
+                <a:solidFill>
+                  <a:srgbClr val="1F2933"/>
+                </a:solidFill>
+                <a:latin typeface="Cambria" pitchFamily="34" charset="0"/>
+                <a:ea typeface="Cambria" pitchFamily="34" charset="-122"/>
+                <a:cs typeface="Cambria" pitchFamily="34" charset="-120"/>
+              </a:rPr>
+              <a:t>LITE and DEHB come from different families</a:t>
+            </a:r>
+            <a:endParaRPr lang="en-US" sz="2800" dirty="0"/>
+          </a:p>
+        </p:txBody>
+      </p:sp>
+      <p:sp>
+        <p:nvSpPr>
+          <p:cNvPr id="3" name="Text 1"/>
+          <p:cNvSpPr txBox="1"/>
+          <p:nvPr/>
+        </p:nvSpPr>
+        <p:spPr>
+          <a:xfrm>
+            <a:off x="457200" y="914400"/>
+            <a:ext cx="5669280" cy="274320"/>
+          </a:xfrm>
+          <a:prstGeom prst="rect">
+            <a:avLst/>
+          </a:prstGeom>
+          <a:noFill/>
+          <a:ln/>
+        </p:spPr>
+        <p:txBody>
+          <a:bodyPr wrap="square" lIns="0" tIns="0" rIns="0" bIns="0" rtlCol="0" anchor="ctr"/>
+          <a:lstStyle/>
+          <a:p>
+            <a:pPr marL="0" indent="0">
+              <a:buNone/>
+            </a:pPr>
+            <a:r>
+              <a:rPr lang="en-US" sz="1400" dirty="0">
+                <a:solidFill>
+                  <a:srgbClr val="1F2933"/>
+                </a:solidFill>
+              </a:rPr>
+              <a:t>Optimizer families. </a:t>
+            </a:r>
+            <a:r>
+              <a:rPr lang="en-US" sz="1400" b="1" dirty="0">
+                <a:solidFill>
+                  <a:srgbClr val="A44A3F"/>
+                </a:solidFill>
+              </a:rPr>
+              <a:t>Red</a:t>
+            </a:r>
+            <a:r>
+              <a:rPr lang="en-US" sz="1400" dirty="0">
+                <a:solidFill>
+                  <a:srgbClr val="1F2933"/>
+                </a:solidFill>
+              </a:rPr>
+              <a:t>: the three we compared.</a:t>
+            </a:r>
+            <a:endParaRPr lang="en-US" sz="1400" dirty="0"/>
+          </a:p>
+        </p:txBody>
+      </p:sp>
+      <p:pic>
+        <p:nvPicPr>
+          <p:cNvPr id="4" name="Image 0" descr="tree.png"/>
+          <p:cNvPicPr>
+            <a:picLocks noChangeAspect="1"/>
+          </p:cNvPicPr>
+          <p:nvPr/>
+        </p:nvPicPr>
+        <p:blipFill>
+          <a:blip r:embed="rId3"/>
+          <a:stretch>
+            <a:fillRect/>
+          </a:stretch>
+        </p:blipFill>
+        <p:spPr>
+          <a:xfrm>
+            <a:off x="457200" y="1234440"/>
+            <a:ext cx="5394960" cy="3281554"/>
+          </a:xfrm>
+          <a:prstGeom prst="rect">
+            <a:avLst/>
+          </a:prstGeom>
+        </p:spPr>
+      </p:pic>
+      <p:sp>
+        <p:nvSpPr>
+          <p:cNvPr id="5" name="Text 2"/>
+          <p:cNvSpPr txBox="1"/>
+          <p:nvPr/>
+        </p:nvSpPr>
+        <p:spPr>
+          <a:xfrm>
+            <a:off x="6446520" y="914400"/>
+            <a:ext cx="2240280" cy="274320"/>
+          </a:xfrm>
+          <a:prstGeom prst="rect">
+            <a:avLst/>
+          </a:prstGeom>
+          <a:noFill/>
+          <a:ln/>
+        </p:spPr>
+        <p:txBody>
+          <a:bodyPr wrap="square" lIns="0" tIns="0" rIns="0" bIns="0" rtlCol="0" anchor="ctr"/>
+          <a:lstStyle/>
+          <a:p>
+            <a:pPr marL="0" indent="0">
+              <a:buNone/>
+            </a:pPr>
+            <a:r>
+              <a:rPr lang="en-US" sz="1400" b="1" dirty="0">
+                <a:solidFill>
+                  <a:srgbClr val="1F2933"/>
+                </a:solidFill>
+              </a:rPr>
+              <a:t>Runtime</a:t>
+            </a:r>
+            <a:r>
+              <a:rPr lang="en-US" sz="1400" dirty="0">
+                <a:solidFill>
+                  <a:srgbClr val="1F2933"/>
+                </a:solidFill>
+              </a:rPr>
+              <a:t> (s, log scale)</a:t>
+            </a:r>
+            <a:endParaRPr lang="en-US" sz="1400" dirty="0"/>
+          </a:p>
+        </p:txBody>
+      </p:sp>
+      <p:pic>
+        <p:nvPicPr>
+          <p:cNvPr id="6" name="Image 1" descr="runtime.png"/>
+          <p:cNvPicPr>
+            <a:picLocks noChangeAspect="1"/>
+          </p:cNvPicPr>
+          <p:nvPr/>
+        </p:nvPicPr>
+        <p:blipFill>
+          <a:blip r:embed="rId4"/>
+          <a:stretch>
+            <a:fillRect/>
+          </a:stretch>
+        </p:blipFill>
+        <p:spPr>
+          <a:xfrm>
+            <a:off x="6537960" y="1234440"/>
+            <a:ext cx="1832631" cy="3337560"/>
+          </a:xfrm>
+          <a:prstGeom prst="rect">
+            <a:avLst/>
+          </a:prstGeom>
+        </p:spPr>
+      </p:pic>
+      <p:sp>
+        <p:nvSpPr>
+          <p:cNvPr id="7" name="Text 3"/>
+          <p:cNvSpPr txBox="1"/>
+          <p:nvPr/>
+        </p:nvSpPr>
+        <p:spPr>
+          <a:xfrm>
+            <a:off x="457200" y="4709160"/>
+            <a:ext cx="7680960" cy="274320"/>
+          </a:xfrm>
+          <a:prstGeom prst="rect">
+            <a:avLst/>
+          </a:prstGeom>
+          <a:noFill/>
+          <a:ln/>
+        </p:spPr>
+        <p:txBody>
+          <a:bodyPr wrap="square" lIns="0" tIns="0" rIns="0" bIns="0" rtlCol="0" anchor="b"/>
+          <a:lstStyle/>
+          <a:p>
+            <a:pPr marL="0" indent="0">
+              <a:buNone/>
+            </a:pPr>
+            <a:r>
+              <a:rPr lang="en-US" sz="1000" dirty="0">
+                <a:solidFill>
+                  <a:srgbClr val="5C6B73"/>
+                </a:solidFill>
+              </a:rPr>
+              <a:t>Lustosa &amp; Menzies, IEEE TSE, 2026, Figs. 5 and 6.C. DEHB ≈ 1,000+ s; LITE and random &lt; 50 s.</a:t>
+            </a:r>
+            <a:endParaRPr lang="en-US" sz="1000" dirty="0"/>
+          </a:p>
+        </p:txBody>
+      </p:sp>
+      <p:sp>
+        <p:nvSpPr>
+          <p:cNvPr id="25" name="Slide Number Placeholder 0"/>
+          <p:cNvSpPr>
+            <a:spLocks noGrp="1"/>
+          </p:cNvSpPr>
+          <p:nvPr>
+            <p:ph type="sldNum" sz="quarter" idx="4294967295"/>
+          </p:nvPr>
+        </p:nvSpPr>
+        <p:spPr>
+          <a:xfrm>
+            <a:off x="8229600" y="4754880"/>
+            <a:ext cx="502920" cy="274320"/>
+          </a:xfrm>
+          <a:prstGeom prst="rect">
+            <a:avLst/>
+          </a:prstGeom>
+          <a:extLst>
+            <a:ext uri="{C572A759-6A51-4108-AA02-DFA0A04FC94B}">
+              <ma14:wrappingTextBoxFlag xmlns="" xmlns:ma14="http://schemas.microsoft.com/office/mac/drawingml/2011/main" val="0"/>
+            </a:ext>
+          </a:extLst>
+        </p:spPr>
+        <p:txBody>
+          <a:bodyPr/>
+          <a:lstStyle>
+            <a:lvl1pPr>
+              <a:defRPr sz="1000">
+                <a:solidFill>
+                  <a:srgbClr val="5C6B73"/>
+                </a:solidFill>
+                <a:latin typeface="Calibri"/>
+                <a:ea typeface="Calibri"/>
+                <a:cs typeface="Calibri"/>
+              </a:defRPr>
+            </a:lvl1pPr>
+          </a:lstStyle>
+          <a:p>
+            <a:pPr algn="r"/>
+            <a:fld id="{F7021451-1387-4CA6-816F-3879F97B5CBC}" type="slidenum">
+              <a:rPr lang="en-US" b="0"/>
+              <a:t>8</a:t>
+            </a:fld>
+            <a:endParaRPr lang="en-US"/>
+          </a:p>
+        </p:txBody>
+      </p:sp>
+    </p:spTree>
+  </p:cSld>
+  <p:clrMapOvr>
+    <a:masterClrMapping/>
+  </p:clrMapOvr>
+</p:sld>
+</file>
+
+<file path=ppt/slides/slide9.xml><?xml version="1.0" encoding="utf-8"?>
 <p:sld xmlns:a="http://schemas.openxmlformats.org/drawingml/2006/main" xmlns:r="http://schemas.openxmlformats.org/officeDocument/2006/relationships" xmlns:p="http://schemas.openxmlformats.org/presentationml/2006/main">
   <p:cSld name="Slide 6">
     <p:spTree>
@@ -6992,1051 +8258,7 @@
           </a:prstGeom>
           <a:extLst>
             <a:ext uri="{C572A759-6A51-4108-AA02-DFA0A04FC94B}">
-              <ma14:wrappingTextBoxFlag xmlns:ma14="http://schemas.microsoft.com/office/mac/drawingml/2011/main" xmlns="" val="0"/>
-            </a:ext>
-          </a:extLst>
-        </p:spPr>
-        <p:txBody>
-          <a:bodyPr/>
-          <a:lstStyle>
-            <a:lvl1pPr>
-              <a:defRPr sz="1000">
-                <a:solidFill>
-                  <a:srgbClr val="5C6B73"/>
-                </a:solidFill>
-                <a:latin typeface="Calibri"/>
-                <a:ea typeface="Calibri"/>
-                <a:cs typeface="Calibri"/>
-              </a:defRPr>
-            </a:lvl1pPr>
-          </a:lstStyle>
-          <a:p>
-            <a:pPr algn="r"/>
-            <a:fld id="{F7021451-1387-4CA6-816F-3879F97B5CBC}" type="slidenum">
-              <a:rPr lang="en-US" b="0"/>
-              <a:t>6</a:t>
-            </a:fld>
-            <a:endParaRPr lang="en-US"/>
-          </a:p>
-        </p:txBody>
-      </p:sp>
-    </p:spTree>
-  </p:cSld>
-  <p:clrMapOvr>
-    <a:masterClrMapping/>
-  </p:clrMapOvr>
-</p:sld>
-</file>
-
-<file path=ppt/slides/slide7.xml><?xml version="1.0" encoding="utf-8"?>
-<p:sld xmlns:a="http://schemas.openxmlformats.org/drawingml/2006/main" xmlns:r="http://schemas.openxmlformats.org/officeDocument/2006/relationships" xmlns:p="http://schemas.openxmlformats.org/presentationml/2006/main">
-  <p:cSld name="Slide 7">
-    <p:spTree>
-      <p:nvGrpSpPr>
-        <p:cNvPr id="1" name=""/>
-        <p:cNvGrpSpPr/>
-        <p:nvPr/>
-      </p:nvGrpSpPr>
-      <p:grpSpPr>
-        <a:xfrm>
-          <a:off x="0" y="0"/>
-          <a:ext cx="0" cy="0"/>
-          <a:chOff x="0" y="0"/>
-          <a:chExt cx="0" cy="0"/>
-        </a:xfrm>
-      </p:grpSpPr>
-      <p:sp>
-        <p:nvSpPr>
-          <p:cNvPr id="2" name="Text 0"/>
-          <p:cNvSpPr>
-            <a:spLocks noGrp="1"/>
-          </p:cNvSpPr>
-          <p:nvPr>
-            <p:ph type="title" idx="100" hasCustomPrompt="1"/>
-          </p:nvPr>
-        </p:nvSpPr>
-        <p:spPr>
-          <a:xfrm>
-            <a:off x="457200" y="274320"/>
-            <a:ext cx="8229600" cy="640080"/>
-          </a:xfrm>
-          <a:prstGeom prst="rect">
-            <a:avLst/>
-          </a:prstGeom>
-          <a:noFill/>
-          <a:ln/>
-        </p:spPr>
-        <p:txBody>
-          <a:bodyPr wrap="square" lIns="0" tIns="0" rIns="0" bIns="0" rtlCol="0" anchor="t"/>
-          <a:lstStyle/>
-          <a:p>
-            <a:pPr marL="0" indent="0" algn="l">
-              <a:buNone/>
-            </a:pPr>
-            <a:r>
-              <a:rPr lang="en-US" sz="2800" b="1" dirty="0">
-                <a:solidFill>
-                  <a:srgbClr val="1F2933"/>
-                </a:solidFill>
-                <a:latin typeface="Cambria" pitchFamily="34" charset="0"/>
-                <a:ea typeface="Cambria" pitchFamily="34" charset="-122"/>
-                <a:cs typeface="Cambria" pitchFamily="34" charset="-120"/>
-              </a:rPr>
-              <a:t>LITE and DEHB come from different families</a:t>
-            </a:r>
-            <a:endParaRPr lang="en-US" sz="2800" dirty="0"/>
-          </a:p>
-        </p:txBody>
-      </p:sp>
-      <p:sp>
-        <p:nvSpPr>
-          <p:cNvPr id="3" name="Text 1"/>
-          <p:cNvSpPr txBox="1"/>
-          <p:nvPr/>
-        </p:nvSpPr>
-        <p:spPr>
-          <a:xfrm>
-            <a:off x="457200" y="914400"/>
-            <a:ext cx="5669280" cy="274320"/>
-          </a:xfrm>
-          <a:prstGeom prst="rect">
-            <a:avLst/>
-          </a:prstGeom>
-          <a:noFill/>
-          <a:ln/>
-        </p:spPr>
-        <p:txBody>
-          <a:bodyPr wrap="square" lIns="0" tIns="0" rIns="0" bIns="0" rtlCol="0" anchor="ctr"/>
-          <a:lstStyle/>
-          <a:p>
-            <a:pPr marL="0" indent="0">
-              <a:buNone/>
-            </a:pPr>
-            <a:r>
-              <a:rPr lang="en-US" sz="1400" dirty="0">
-                <a:solidFill>
-                  <a:srgbClr val="1F2933"/>
-                </a:solidFill>
-              </a:rPr>
-              <a:t>Optimizer families. </a:t>
-            </a:r>
-            <a:r>
-              <a:rPr lang="en-US" sz="1400" b="1" dirty="0">
-                <a:solidFill>
-                  <a:srgbClr val="A44A3F"/>
-                </a:solidFill>
-              </a:rPr>
-              <a:t>Red</a:t>
-            </a:r>
-            <a:r>
-              <a:rPr lang="en-US" sz="1400" dirty="0">
-                <a:solidFill>
-                  <a:srgbClr val="1F2933"/>
-                </a:solidFill>
-              </a:rPr>
-              <a:t>: the three we compared.</a:t>
-            </a:r>
-            <a:endParaRPr lang="en-US" sz="1400" dirty="0"/>
-          </a:p>
-        </p:txBody>
-      </p:sp>
-      <p:pic>
-        <p:nvPicPr>
-          <p:cNvPr id="4" name="Image 0" descr="tree.png"/>
-          <p:cNvPicPr>
-            <a:picLocks noChangeAspect="1"/>
-          </p:cNvPicPr>
-          <p:nvPr/>
-        </p:nvPicPr>
-        <p:blipFill>
-          <a:blip r:embed="rId3"/>
-          <a:stretch>
-            <a:fillRect/>
-          </a:stretch>
-        </p:blipFill>
-        <p:spPr>
-          <a:xfrm>
-            <a:off x="457200" y="1234440"/>
-            <a:ext cx="5394960" cy="3281554"/>
-          </a:xfrm>
-          <a:prstGeom prst="rect">
-            <a:avLst/>
-          </a:prstGeom>
-        </p:spPr>
-      </p:pic>
-      <p:sp>
-        <p:nvSpPr>
-          <p:cNvPr id="5" name="Text 2"/>
-          <p:cNvSpPr txBox="1"/>
-          <p:nvPr/>
-        </p:nvSpPr>
-        <p:spPr>
-          <a:xfrm>
-            <a:off x="6446520" y="914400"/>
-            <a:ext cx="2240280" cy="274320"/>
-          </a:xfrm>
-          <a:prstGeom prst="rect">
-            <a:avLst/>
-          </a:prstGeom>
-          <a:noFill/>
-          <a:ln/>
-        </p:spPr>
-        <p:txBody>
-          <a:bodyPr wrap="square" lIns="0" tIns="0" rIns="0" bIns="0" rtlCol="0" anchor="ctr"/>
-          <a:lstStyle/>
-          <a:p>
-            <a:pPr marL="0" indent="0">
-              <a:buNone/>
-            </a:pPr>
-            <a:r>
-              <a:rPr lang="en-US" sz="1400" b="1" dirty="0">
-                <a:solidFill>
-                  <a:srgbClr val="1F2933"/>
-                </a:solidFill>
-              </a:rPr>
-              <a:t>Runtime</a:t>
-            </a:r>
-            <a:r>
-              <a:rPr lang="en-US" sz="1400" dirty="0">
-                <a:solidFill>
-                  <a:srgbClr val="1F2933"/>
-                </a:solidFill>
-              </a:rPr>
-              <a:t> (s, log scale)</a:t>
-            </a:r>
-            <a:endParaRPr lang="en-US" sz="1400" dirty="0"/>
-          </a:p>
-        </p:txBody>
-      </p:sp>
-      <p:pic>
-        <p:nvPicPr>
-          <p:cNvPr id="6" name="Image 1" descr="runtime.png"/>
-          <p:cNvPicPr>
-            <a:picLocks noChangeAspect="1"/>
-          </p:cNvPicPr>
-          <p:nvPr/>
-        </p:nvPicPr>
-        <p:blipFill>
-          <a:blip r:embed="rId4"/>
-          <a:stretch>
-            <a:fillRect/>
-          </a:stretch>
-        </p:blipFill>
-        <p:spPr>
-          <a:xfrm>
-            <a:off x="6537960" y="1234440"/>
-            <a:ext cx="1832631" cy="3337560"/>
-          </a:xfrm>
-          <a:prstGeom prst="rect">
-            <a:avLst/>
-          </a:prstGeom>
-        </p:spPr>
-      </p:pic>
-      <p:sp>
-        <p:nvSpPr>
-          <p:cNvPr id="7" name="Text 3"/>
-          <p:cNvSpPr txBox="1"/>
-          <p:nvPr/>
-        </p:nvSpPr>
-        <p:spPr>
-          <a:xfrm>
-            <a:off x="457200" y="4709160"/>
-            <a:ext cx="7680960" cy="274320"/>
-          </a:xfrm>
-          <a:prstGeom prst="rect">
-            <a:avLst/>
-          </a:prstGeom>
-          <a:noFill/>
-          <a:ln/>
-        </p:spPr>
-        <p:txBody>
-          <a:bodyPr wrap="square" lIns="0" tIns="0" rIns="0" bIns="0" rtlCol="0" anchor="b"/>
-          <a:lstStyle/>
-          <a:p>
-            <a:pPr marL="0" indent="0">
-              <a:buNone/>
-            </a:pPr>
-            <a:r>
-              <a:rPr lang="en-US" sz="1000" dirty="0">
-                <a:solidFill>
-                  <a:srgbClr val="5C6B73"/>
-                </a:solidFill>
-              </a:rPr>
-              <a:t>Lustosa &amp; Menzies, IEEE TSE, 2026, Figs. 5 and 6.C. DEHB ≈ 1,000+ s; LITE and random &lt; 50 s.</a:t>
-            </a:r>
-            <a:endParaRPr lang="en-US" sz="1000" dirty="0"/>
-          </a:p>
-        </p:txBody>
-      </p:sp>
-      <p:sp>
-        <p:nvSpPr>
-          <p:cNvPr id="25" name="Slide Number Placeholder 0"/>
-          <p:cNvSpPr>
-            <a:spLocks noGrp="1"/>
-          </p:cNvSpPr>
-          <p:nvPr>
-            <p:ph type="sldNum" sz="quarter" idx="4294967295"/>
-          </p:nvPr>
-        </p:nvSpPr>
-        <p:spPr>
-          <a:xfrm>
-            <a:off x="8229600" y="4754880"/>
-            <a:ext cx="502920" cy="274320"/>
-          </a:xfrm>
-          <a:prstGeom prst="rect">
-            <a:avLst/>
-          </a:prstGeom>
-          <a:extLst>
-            <a:ext uri="{C572A759-6A51-4108-AA02-DFA0A04FC94B}">
-              <ma14:wrappingTextBoxFlag xmlns:ma14="http://schemas.microsoft.com/office/mac/drawingml/2011/main" xmlns="" val="0"/>
-            </a:ext>
-          </a:extLst>
-        </p:spPr>
-        <p:txBody>
-          <a:bodyPr/>
-          <a:lstStyle>
-            <a:lvl1pPr>
-              <a:defRPr sz="1000">
-                <a:solidFill>
-                  <a:srgbClr val="5C6B73"/>
-                </a:solidFill>
-                <a:latin typeface="Calibri"/>
-                <a:ea typeface="Calibri"/>
-                <a:cs typeface="Calibri"/>
-              </a:defRPr>
-            </a:lvl1pPr>
-          </a:lstStyle>
-          <a:p>
-            <a:pPr algn="r"/>
-            <a:fld id="{F7021451-1387-4CA6-816F-3879F97B5CBC}" type="slidenum">
-              <a:rPr lang="en-US" b="0"/>
-              <a:t>7</a:t>
-            </a:fld>
-            <a:endParaRPr lang="en-US"/>
-          </a:p>
-        </p:txBody>
-      </p:sp>
-    </p:spTree>
-  </p:cSld>
-  <p:clrMapOvr>
-    <a:masterClrMapping/>
-  </p:clrMapOvr>
-</p:sld>
-</file>
-
-<file path=ppt/slides/slide8.xml><?xml version="1.0" encoding="utf-8"?>
-<p:sld xmlns:a="http://schemas.openxmlformats.org/drawingml/2006/main" xmlns:r="http://schemas.openxmlformats.org/officeDocument/2006/relationships" xmlns:p="http://schemas.openxmlformats.org/presentationml/2006/main">
-  <p:cSld name="Slide 8">
-    <p:spTree>
-      <p:nvGrpSpPr>
-        <p:cNvPr id="1" name=""/>
-        <p:cNvGrpSpPr/>
-        <p:nvPr/>
-      </p:nvGrpSpPr>
-      <p:grpSpPr>
-        <a:xfrm>
-          <a:off x="0" y="0"/>
-          <a:ext cx="0" cy="0"/>
-          <a:chOff x="0" y="0"/>
-          <a:chExt cx="0" cy="0"/>
-        </a:xfrm>
-      </p:grpSpPr>
-      <p:sp>
-        <p:nvSpPr>
-          <p:cNvPr id="2" name="Text 0"/>
-          <p:cNvSpPr txBox="1"/>
-          <p:nvPr/>
-        </p:nvSpPr>
-        <p:spPr>
-          <a:xfrm>
-            <a:off x="457200" y="274320"/>
-            <a:ext cx="2743200" cy="1188720"/>
-          </a:xfrm>
-          <a:prstGeom prst="rect">
-            <a:avLst/>
-          </a:prstGeom>
-          <a:noFill/>
-          <a:ln/>
-        </p:spPr>
-        <p:txBody>
-          <a:bodyPr wrap="square" lIns="0" tIns="0" rIns="0" bIns="0" rtlCol="0" anchor="t"/>
-          <a:lstStyle/>
-          <a:p>
-            <a:pPr marL="0" indent="0">
-              <a:buNone/>
-            </a:pPr>
-            <a:r>
-              <a:rPr lang="en-US" sz="2800" b="1" dirty="0">
-                <a:solidFill>
-                  <a:srgbClr val="1F2933"/>
-                </a:solidFill>
-                <a:latin typeface="Cambria" pitchFamily="34" charset="0"/>
-                <a:ea typeface="Cambria" pitchFamily="34" charset="-122"/>
-                <a:cs typeface="Cambria" pitchFamily="34" charset="-120"/>
-              </a:rPr>
-              <a:t>DRR predicts when simple is enough</a:t>
-            </a:r>
-            <a:endParaRPr lang="en-US" sz="2800" dirty="0"/>
-          </a:p>
-        </p:txBody>
-      </p:sp>
-      <p:sp>
-        <p:nvSpPr>
-          <p:cNvPr id="3" name="Text 1"/>
-          <p:cNvSpPr txBox="1"/>
-          <p:nvPr/>
-        </p:nvSpPr>
-        <p:spPr>
-          <a:xfrm>
-            <a:off x="457200" y="1783080"/>
-            <a:ext cx="2743200" cy="2743200"/>
-          </a:xfrm>
-          <a:prstGeom prst="rect">
-            <a:avLst/>
-          </a:prstGeom>
-          <a:noFill/>
-          <a:ln/>
-        </p:spPr>
-        <p:txBody>
-          <a:bodyPr wrap="square" lIns="0" tIns="0" rIns="0" bIns="0" rtlCol="0" anchor="t"/>
-          <a:lstStyle/>
-          <a:p>
-            <a:pPr marL="0" indent="0">
-              <a:spcAft>
-                <a:spcPts val="800"/>
-              </a:spcAft>
-              <a:buNone/>
-            </a:pPr>
-            <a:r>
-              <a:rPr lang="en-US" sz="1500" dirty="0">
-                <a:solidFill>
-                  <a:srgbClr val="1F2933"/>
-                </a:solidFill>
-              </a:rPr>
-              <a:t>Each dot is one data set.</a:t>
-            </a:r>
-            <a:endParaRPr lang="en-US" sz="1500" dirty="0"/>
-          </a:p>
-          <a:p>
-            <a:pPr marL="0" indent="0">
-              <a:spcAft>
-                <a:spcPts val="800"/>
-              </a:spcAft>
-              <a:buNone/>
-            </a:pPr>
-            <a:r>
-              <a:rPr lang="en-US" sz="1500" b="1" dirty="0">
-                <a:solidFill>
-                  <a:srgbClr val="A44A3F"/>
-                </a:solidFill>
-              </a:rPr>
-              <a:t>Red</a:t>
-            </a:r>
-            <a:r>
-              <a:rPr lang="en-US" sz="1500" dirty="0">
-                <a:solidFill>
-                  <a:srgbClr val="1F2933"/>
-                </a:solidFill>
-              </a:rPr>
-              <a:t>: DEHB beat LITE.</a:t>
-            </a:r>
-            <a:endParaRPr lang="en-US" sz="1500" dirty="0"/>
-          </a:p>
-          <a:p>
-            <a:pPr marL="0" indent="0">
-              <a:spcAft>
-                <a:spcPts val="800"/>
-              </a:spcAft>
-              <a:buNone/>
-            </a:pPr>
-            <a:r>
-              <a:rPr lang="en-US" sz="1500" b="1" dirty="0">
-                <a:solidFill>
-                  <a:srgbClr val="4E8F4E"/>
-                </a:solidFill>
-              </a:rPr>
-              <a:t>Green</a:t>
-            </a:r>
-            <a:r>
-              <a:rPr lang="en-US" sz="1500" dirty="0">
-                <a:solidFill>
-                  <a:srgbClr val="1F2933"/>
-                </a:solidFill>
-              </a:rPr>
-              <a:t>: a tie.</a:t>
-            </a:r>
-            <a:endParaRPr lang="en-US" sz="1500" dirty="0"/>
-          </a:p>
-          <a:p>
-            <a:pPr marL="0" indent="0">
-              <a:spcAft>
-                <a:spcPts val="800"/>
-              </a:spcAft>
-              <a:buNone/>
-            </a:pPr>
-            <a:r>
-              <a:rPr lang="en-US" sz="1500" b="1" dirty="0">
-                <a:solidFill>
-                  <a:srgbClr val="1F2933"/>
-                </a:solidFill>
-              </a:rPr>
-              <a:t>Top: </a:t>
-            </a:r>
-            <a:r>
-              <a:rPr lang="en-US" sz="1500" dirty="0">
-                <a:solidFill>
-                  <a:srgbClr val="1F2933"/>
-                </a:solidFill>
-              </a:rPr>
-              <a:t>intrinsic dimensionality alone does not split them.</a:t>
-            </a:r>
-            <a:endParaRPr lang="en-US" sz="1500" dirty="0"/>
-          </a:p>
-          <a:p>
-            <a:pPr marL="0" indent="0">
-              <a:spcAft>
-                <a:spcPts val="800"/>
-              </a:spcAft>
-              <a:buNone/>
-            </a:pPr>
-            <a:r>
-              <a:rPr lang="en-US" sz="1500" b="1" dirty="0">
-                <a:solidFill>
-                  <a:srgbClr val="1F2933"/>
-                </a:solidFill>
-              </a:rPr>
-              <a:t>Bottom: </a:t>
-            </a:r>
-            <a:r>
-              <a:rPr lang="en-US" sz="1500" dirty="0">
-                <a:solidFill>
-                  <a:srgbClr val="1F2933"/>
-                </a:solidFill>
-              </a:rPr>
-              <a:t>DRR does. Above 0.35, every data set is a tie.</a:t>
-            </a:r>
-            <a:endParaRPr lang="en-US" sz="1500" dirty="0"/>
-          </a:p>
-        </p:txBody>
-      </p:sp>
-      <p:pic>
-        <p:nvPicPr>
-          <p:cNvPr id="4" name="Image 0" descr="fig3.png"/>
-          <p:cNvPicPr>
-            <a:picLocks noChangeAspect="1"/>
-          </p:cNvPicPr>
-          <p:nvPr/>
-        </p:nvPicPr>
-        <p:blipFill>
-          <a:blip r:embed="rId3"/>
-          <a:stretch>
-            <a:fillRect/>
-          </a:stretch>
-        </p:blipFill>
-        <p:spPr>
-          <a:xfrm>
-            <a:off x="3383280" y="274320"/>
-            <a:ext cx="5303520" cy="1943880"/>
-          </a:xfrm>
-          <a:prstGeom prst="rect">
-            <a:avLst/>
-          </a:prstGeom>
-        </p:spPr>
-      </p:pic>
-      <p:pic>
-        <p:nvPicPr>
-          <p:cNvPr id="5" name="Image 1" descr="fig4.png"/>
-          <p:cNvPicPr>
-            <a:picLocks noChangeAspect="1"/>
-          </p:cNvPicPr>
-          <p:nvPr/>
-        </p:nvPicPr>
-        <p:blipFill>
-          <a:blip r:embed="rId4"/>
-          <a:stretch>
-            <a:fillRect/>
-          </a:stretch>
-        </p:blipFill>
-        <p:spPr>
-          <a:xfrm>
-            <a:off x="3383280" y="2331720"/>
-            <a:ext cx="5303520" cy="1934664"/>
-          </a:xfrm>
-          <a:prstGeom prst="rect">
-            <a:avLst/>
-          </a:prstGeom>
-        </p:spPr>
-      </p:pic>
-      <p:sp>
-        <p:nvSpPr>
-          <p:cNvPr id="6" name="Text 2"/>
-          <p:cNvSpPr txBox="1"/>
-          <p:nvPr/>
-        </p:nvSpPr>
-        <p:spPr>
-          <a:xfrm>
-            <a:off x="457200" y="4709160"/>
-            <a:ext cx="7680960" cy="274320"/>
-          </a:xfrm>
-          <a:prstGeom prst="rect">
-            <a:avLst/>
-          </a:prstGeom>
-          <a:noFill/>
-          <a:ln/>
-        </p:spPr>
-        <p:txBody>
-          <a:bodyPr wrap="square" lIns="0" tIns="0" rIns="0" bIns="0" rtlCol="0" anchor="b"/>
-          <a:lstStyle/>
-          <a:p>
-            <a:pPr marL="0" indent="0">
-              <a:buNone/>
-            </a:pPr>
-            <a:r>
-              <a:rPr lang="en-US" sz="1000" dirty="0">
-                <a:solidFill>
-                  <a:srgbClr val="5C6B73"/>
-                </a:solidFill>
-              </a:rPr>
-              <a:t>Lustosa &amp; Menzies, IEEE TSE, 2026, Figs. 3 and 4.</a:t>
-            </a:r>
-            <a:endParaRPr lang="en-US" sz="1000" dirty="0"/>
-          </a:p>
-        </p:txBody>
-      </p:sp>
-      <p:sp>
-        <p:nvSpPr>
-          <p:cNvPr id="7" name="Text 0"/>
-          <p:cNvSpPr>
-            <a:spLocks noGrp="1"/>
-          </p:cNvSpPr>
-          <p:nvPr>
-            <p:ph type="title" idx="100" hasCustomPrompt="1"/>
-          </p:nvPr>
-        </p:nvSpPr>
-        <p:spPr>
-          <a:xfrm>
-            <a:off x="457200" y="274320"/>
-            <a:ext cx="8229600" cy="640080"/>
-          </a:xfrm>
-          <a:prstGeom prst="rect">
-            <a:avLst/>
-          </a:prstGeom>
-          <a:noFill/>
-          <a:ln/>
-        </p:spPr>
-        <p:txBody>
-          <a:bodyPr wrap="square" lIns="0" tIns="0" rIns="0" bIns="0" rtlCol="0" anchor="t"/>
-          <a:lstStyle/>
-          <a:p>
-            <a:pPr marL="0" indent="0" algn="l">
-              <a:buNone/>
-            </a:pPr>
-            <a:endParaRPr lang="en-US" sz="2800" dirty="0"/>
-          </a:p>
-        </p:txBody>
-      </p:sp>
-      <p:sp>
-        <p:nvSpPr>
-          <p:cNvPr id="25" name="Slide Number Placeholder 0"/>
-          <p:cNvSpPr>
-            <a:spLocks noGrp="1"/>
-          </p:cNvSpPr>
-          <p:nvPr>
-            <p:ph type="sldNum" sz="quarter" idx="4294967295"/>
-          </p:nvPr>
-        </p:nvSpPr>
-        <p:spPr>
-          <a:xfrm>
-            <a:off x="8229600" y="4754880"/>
-            <a:ext cx="502920" cy="274320"/>
-          </a:xfrm>
-          <a:prstGeom prst="rect">
-            <a:avLst/>
-          </a:prstGeom>
-          <a:extLst>
-            <a:ext uri="{C572A759-6A51-4108-AA02-DFA0A04FC94B}">
-              <ma14:wrappingTextBoxFlag xmlns:ma14="http://schemas.microsoft.com/office/mac/drawingml/2011/main" xmlns="" val="0"/>
-            </a:ext>
-          </a:extLst>
-        </p:spPr>
-        <p:txBody>
-          <a:bodyPr/>
-          <a:lstStyle>
-            <a:lvl1pPr>
-              <a:defRPr sz="1000">
-                <a:solidFill>
-                  <a:srgbClr val="5C6B73"/>
-                </a:solidFill>
-                <a:latin typeface="Calibri"/>
-                <a:ea typeface="Calibri"/>
-                <a:cs typeface="Calibri"/>
-              </a:defRPr>
-            </a:lvl1pPr>
-          </a:lstStyle>
-          <a:p>
-            <a:pPr algn="r"/>
-            <a:fld id="{F7021451-1387-4CA6-816F-3879F97B5CBC}" type="slidenum">
-              <a:rPr lang="en-US" b="0"/>
-              <a:t>8</a:t>
-            </a:fld>
-            <a:endParaRPr lang="en-US"/>
-          </a:p>
-        </p:txBody>
-      </p:sp>
-    </p:spTree>
-  </p:cSld>
-  <p:clrMapOvr>
-    <a:masterClrMapping/>
-  </p:clrMapOvr>
-</p:sld>
-</file>
-
-<file path=ppt/slides/slide9.xml><?xml version="1.0" encoding="utf-8"?>
-<p:sld xmlns:a="http://schemas.openxmlformats.org/drawingml/2006/main" xmlns:r="http://schemas.openxmlformats.org/officeDocument/2006/relationships" xmlns:p="http://schemas.openxmlformats.org/presentationml/2006/main">
-  <p:cSld name="Slide 9">
-    <p:spTree>
-      <p:nvGrpSpPr>
-        <p:cNvPr id="1" name=""/>
-        <p:cNvGrpSpPr/>
-        <p:nvPr/>
-      </p:nvGrpSpPr>
-      <p:grpSpPr>
-        <a:xfrm>
-          <a:off x="0" y="0"/>
-          <a:ext cx="0" cy="0"/>
-          <a:chOff x="0" y="0"/>
-          <a:chExt cx="0" cy="0"/>
-        </a:xfrm>
-      </p:grpSpPr>
-      <p:sp>
-        <p:nvSpPr>
-          <p:cNvPr id="2" name="Text 0"/>
-          <p:cNvSpPr>
-            <a:spLocks noGrp="1"/>
-          </p:cNvSpPr>
-          <p:nvPr>
-            <p:ph type="title" idx="100" hasCustomPrompt="1"/>
-          </p:nvPr>
-        </p:nvSpPr>
-        <p:spPr>
-          <a:xfrm>
-            <a:off x="457200" y="274320"/>
-            <a:ext cx="8229600" cy="640080"/>
-          </a:xfrm>
-          <a:prstGeom prst="rect">
-            <a:avLst/>
-          </a:prstGeom>
-          <a:noFill/>
-          <a:ln/>
-        </p:spPr>
-        <p:txBody>
-          <a:bodyPr wrap="square" lIns="0" tIns="0" rIns="0" bIns="0" rtlCol="0" anchor="t"/>
-          <a:lstStyle/>
-          <a:p>
-            <a:pPr marL="0" indent="0" algn="l">
-              <a:buNone/>
-            </a:pPr>
-            <a:r>
-              <a:rPr lang="en-US" sz="2800" b="1" dirty="0">
-                <a:solidFill>
-                  <a:srgbClr val="1F2933"/>
-                </a:solidFill>
-                <a:latin typeface="Cambria" pitchFamily="34" charset="0"/>
-                <a:ea typeface="Cambria" pitchFamily="34" charset="-122"/>
-                <a:cs typeface="Cambria" pitchFamily="34" charset="-120"/>
-              </a:rPr>
-              <a:t>On SE data, 30 evaluations match 3,000</a:t>
-            </a:r>
-            <a:endParaRPr lang="en-US" sz="2800" dirty="0"/>
-          </a:p>
-        </p:txBody>
-      </p:sp>
-      <p:sp>
-        <p:nvSpPr>
-          <p:cNvPr id="3" name="Text 1"/>
-          <p:cNvSpPr txBox="1"/>
-          <p:nvPr/>
-        </p:nvSpPr>
-        <p:spPr>
-          <a:xfrm>
-            <a:off x="457200" y="914400"/>
-            <a:ext cx="4206240" cy="274320"/>
-          </a:xfrm>
-          <a:prstGeom prst="rect">
-            <a:avLst/>
-          </a:prstGeom>
-          <a:noFill/>
-          <a:ln/>
-        </p:spPr>
-        <p:txBody>
-          <a:bodyPr wrap="square" lIns="0" tIns="0" rIns="0" bIns="0" rtlCol="0" anchor="ctr"/>
-          <a:lstStyle/>
-          <a:p>
-            <a:pPr marL="0" indent="0">
-              <a:buNone/>
-            </a:pPr>
-            <a:r>
-              <a:rPr lang="en-US" sz="1500" b="1" dirty="0">
-                <a:solidFill>
-                  <a:srgbClr val="3D6B8C"/>
-                </a:solidFill>
-              </a:rPr>
-              <a:t>SE data</a:t>
-            </a:r>
-            <a:r>
-              <a:rPr lang="en-US" sz="1500" dirty="0">
-                <a:solidFill>
-                  <a:srgbClr val="1F2933"/>
-                </a:solidFill>
-              </a:rPr>
-              <a:t> (50 tasks): LITE = DEHB</a:t>
-            </a:r>
-            <a:endParaRPr lang="en-US" sz="1500" dirty="0"/>
-          </a:p>
-        </p:txBody>
-      </p:sp>
-      <p:pic>
-        <p:nvPicPr>
-          <p:cNvPr id="4" name="Image 0" descr="f6a.png"/>
-          <p:cNvPicPr>
-            <a:picLocks noChangeAspect="1"/>
-          </p:cNvPicPr>
-          <p:nvPr/>
-        </p:nvPicPr>
-        <p:blipFill>
-          <a:blip r:embed="rId3"/>
-          <a:stretch>
-            <a:fillRect/>
-          </a:stretch>
-        </p:blipFill>
-        <p:spPr>
-          <a:xfrm>
-            <a:off x="457200" y="1280160"/>
-            <a:ext cx="4206240" cy="2514600"/>
-          </a:xfrm>
-          <a:prstGeom prst="rect">
-            <a:avLst/>
-          </a:prstGeom>
-        </p:spPr>
-      </p:pic>
-      <p:sp>
-        <p:nvSpPr>
-          <p:cNvPr id="5" name="Text 2"/>
-          <p:cNvSpPr txBox="1"/>
-          <p:nvPr/>
-        </p:nvSpPr>
-        <p:spPr>
-          <a:xfrm>
-            <a:off x="4846320" y="914400"/>
-            <a:ext cx="3840480" cy="274320"/>
-          </a:xfrm>
-          <a:prstGeom prst="rect">
-            <a:avLst/>
-          </a:prstGeom>
-          <a:noFill/>
-          <a:ln/>
-        </p:spPr>
-        <p:txBody>
-          <a:bodyPr wrap="square" lIns="0" tIns="0" rIns="0" bIns="0" rtlCol="0" anchor="ctr"/>
-          <a:lstStyle/>
-          <a:p>
-            <a:pPr marL="0" indent="0">
-              <a:buNone/>
-            </a:pPr>
-            <a:r>
-              <a:rPr lang="en-US" sz="1500" b="1" dirty="0">
-                <a:solidFill>
-                  <a:srgbClr val="A44A3F"/>
-                </a:solidFill>
-              </a:rPr>
-              <a:t>Non-SE data</a:t>
-            </a:r>
-            <a:r>
-              <a:rPr lang="en-US" sz="1500" dirty="0">
-                <a:solidFill>
-                  <a:srgbClr val="1F2933"/>
-                </a:solidFill>
-              </a:rPr>
-              <a:t> (UCI): DEHB wins</a:t>
-            </a:r>
-            <a:endParaRPr lang="en-US" sz="1500" dirty="0"/>
-          </a:p>
-        </p:txBody>
-      </p:sp>
-      <p:pic>
-        <p:nvPicPr>
-          <p:cNvPr id="6" name="Image 1" descr="f7a.png"/>
-          <p:cNvPicPr>
-            <a:picLocks noChangeAspect="1"/>
-          </p:cNvPicPr>
-          <p:nvPr/>
-        </p:nvPicPr>
-        <p:blipFill>
-          <a:blip r:embed="rId4"/>
-          <a:stretch>
-            <a:fillRect/>
-          </a:stretch>
-        </p:blipFill>
-        <p:spPr>
-          <a:xfrm>
-            <a:off x="4846320" y="1280160"/>
-            <a:ext cx="3840480" cy="1085353"/>
-          </a:xfrm>
-          <a:prstGeom prst="rect">
-            <a:avLst/>
-          </a:prstGeom>
-        </p:spPr>
-      </p:pic>
-      <p:sp>
-        <p:nvSpPr>
-          <p:cNvPr id="7" name="Text 3"/>
-          <p:cNvSpPr txBox="1"/>
-          <p:nvPr/>
-        </p:nvSpPr>
-        <p:spPr>
-          <a:xfrm>
-            <a:off x="4846320" y="2514600"/>
-            <a:ext cx="3840480" cy="1828800"/>
-          </a:xfrm>
-          <a:prstGeom prst="rect">
-            <a:avLst/>
-          </a:prstGeom>
-          <a:noFill/>
-          <a:ln/>
-        </p:spPr>
-        <p:txBody>
-          <a:bodyPr wrap="square" lIns="0" tIns="0" rIns="0" bIns="0" rtlCol="0" anchor="t"/>
-          <a:lstStyle/>
-          <a:p>
-            <a:pPr marL="0" indent="0">
-              <a:spcAft>
-                <a:spcPts val="600"/>
-              </a:spcAft>
-              <a:buNone/>
-            </a:pPr>
-            <a:r>
-              <a:rPr lang="en-US" sz="1500" dirty="0">
-                <a:solidFill>
-                  <a:srgbClr val="5C6B73"/>
-                </a:solidFill>
-              </a:rPr>
-              <a:t>d2h median over 20 repeats; lower is better.</a:t>
-            </a:r>
-            <a:endParaRPr lang="en-US" sz="1500" dirty="0"/>
-          </a:p>
-          <a:p>
-            <a:pPr marL="342900" indent="-342900">
-              <a:spcAft>
-                <a:spcPts val="600"/>
-              </a:spcAft>
-              <a:buSzPct val="100000"/>
-              <a:buChar char="•"/>
-            </a:pPr>
-            <a:r>
-              <a:rPr lang="en-US" sz="1500" dirty="0">
-                <a:solidFill>
-                  <a:srgbClr val="1F2933"/>
-                </a:solidFill>
-              </a:rPr>
-              <a:t>SE: LITE, DEHB and random overlap.</a:t>
-            </a:r>
-            <a:endParaRPr lang="en-US" sz="1500" dirty="0"/>
-          </a:p>
-          <a:p>
-            <a:pPr marL="342900" indent="-342900">
-              <a:spcAft>
-                <a:spcPts val="600"/>
-              </a:spcAft>
-              <a:buSzPct val="100000"/>
-              <a:buChar char="•"/>
-            </a:pPr>
-            <a:r>
-              <a:rPr lang="en-US" sz="1500" dirty="0">
-                <a:solidFill>
-                  <a:srgbClr val="1F2933"/>
-                </a:solidFill>
-              </a:rPr>
-              <a:t>Non-SE: DEHB (red) is lowest.</a:t>
-            </a:r>
-            <a:endParaRPr lang="en-US" sz="1500" dirty="0"/>
-          </a:p>
-          <a:p>
-            <a:pPr marL="342900" indent="-342900">
-              <a:spcAft>
-                <a:spcPts val="600"/>
-              </a:spcAft>
-              <a:buSzPct val="100000"/>
-              <a:buChar char="•"/>
-            </a:pPr>
-            <a:r>
-              <a:rPr lang="en-US" sz="1500" b="1" dirty="0">
-                <a:solidFill>
-                  <a:srgbClr val="1F2933"/>
-                </a:solidFill>
-              </a:rPr>
-              <a:t>Simple wins because of the data, not luck.</a:t>
-            </a:r>
-            <a:endParaRPr lang="en-US" sz="1500" dirty="0"/>
-          </a:p>
-        </p:txBody>
-      </p:sp>
-      <p:sp>
-        <p:nvSpPr>
-          <p:cNvPr id="8" name="Text 4"/>
-          <p:cNvSpPr txBox="1"/>
-          <p:nvPr/>
-        </p:nvSpPr>
-        <p:spPr>
-          <a:xfrm>
-            <a:off x="457200" y="4709160"/>
-            <a:ext cx="7680960" cy="274320"/>
-          </a:xfrm>
-          <a:prstGeom prst="rect">
-            <a:avLst/>
-          </a:prstGeom>
-          <a:noFill/>
-          <a:ln/>
-        </p:spPr>
-        <p:txBody>
-          <a:bodyPr wrap="square" lIns="0" tIns="0" rIns="0" bIns="0" rtlCol="0" anchor="b"/>
-          <a:lstStyle/>
-          <a:p>
-            <a:pPr marL="0" indent="0">
-              <a:buNone/>
-            </a:pPr>
-            <a:r>
-              <a:rPr lang="en-US" sz="1000" dirty="0">
-                <a:solidFill>
-                  <a:srgbClr val="5C6B73"/>
-                </a:solidFill>
-              </a:rPr>
-              <a:t>Lustosa &amp; Menzies, IEEE TSE, 2026, Figs. 6.A and 7.A.</a:t>
-            </a:r>
-            <a:endParaRPr lang="en-US" sz="1000" dirty="0"/>
-          </a:p>
-        </p:txBody>
-      </p:sp>
-      <p:sp>
-        <p:nvSpPr>
-          <p:cNvPr id="25" name="Slide Number Placeholder 0"/>
-          <p:cNvSpPr>
-            <a:spLocks noGrp="1"/>
-          </p:cNvSpPr>
-          <p:nvPr>
-            <p:ph type="sldNum" sz="quarter" idx="4294967295"/>
-          </p:nvPr>
-        </p:nvSpPr>
-        <p:spPr>
-          <a:xfrm>
-            <a:off x="8229600" y="4754880"/>
-            <a:ext cx="502920" cy="274320"/>
-          </a:xfrm>
-          <a:prstGeom prst="rect">
-            <a:avLst/>
-          </a:prstGeom>
-          <a:extLst>
-            <a:ext uri="{C572A759-6A51-4108-AA02-DFA0A04FC94B}">
-              <ma14:wrappingTextBoxFlag xmlns:ma14="http://schemas.microsoft.com/office/mac/drawingml/2011/main" xmlns="" val="0"/>
+              <ma14:wrappingTextBoxFlag xmlns="" xmlns:ma14="http://schemas.microsoft.com/office/mac/drawingml/2011/main" val="0"/>
             </a:ext>
           </a:extLst>
         </p:spPr>
